--- a/ppt/RAG13-FineTuning.pptx
+++ b/ppt/RAG13-FineTuning.pptx
@@ -5,15 +5,27 @@
     <p:sldMasterId id="2147483653" r:id="rId1"/>
   </p:sldMasterIdLst>
   <p:notesMasterIdLst>
-    <p:notesMasterId r:id="rId5"/>
+    <p:notesMasterId r:id="rId17"/>
   </p:notesMasterIdLst>
   <p:handoutMasterIdLst>
-    <p:handoutMasterId r:id="rId6"/>
+    <p:handoutMasterId r:id="rId18"/>
   </p:handoutMasterIdLst>
   <p:sldIdLst>
     <p:sldId id="264" r:id="rId2"/>
     <p:sldId id="265" r:id="rId3"/>
     <p:sldId id="266" r:id="rId4"/>
+    <p:sldId id="305" r:id="rId5"/>
+    <p:sldId id="311" r:id="rId6"/>
+    <p:sldId id="306" r:id="rId7"/>
+    <p:sldId id="315" r:id="rId8"/>
+    <p:sldId id="325" r:id="rId9"/>
+    <p:sldId id="339" r:id="rId10"/>
+    <p:sldId id="321" r:id="rId11"/>
+    <p:sldId id="323" r:id="rId12"/>
+    <p:sldId id="326" r:id="rId13"/>
+    <p:sldId id="318" r:id="rId14"/>
+    <p:sldId id="278" r:id="rId15"/>
+    <p:sldId id="279" r:id="rId16"/>
   </p:sldIdLst>
   <p:sldSz cx="9144000" cy="6858000" type="screen4x3"/>
   <p:notesSz cx="6648450" cy="9782175"/>
@@ -882,6 +894,130 @@
     </a:lvl9pPr>
   </p:notesStyle>
 </p:notesMaster>
+</file>
+
+<file path=ppt/notesSlides/notesSlide1.xml><?xml version="1.0" encoding="utf-8"?>
+<p:notes xmlns:a="http://schemas.openxmlformats.org/drawingml/2006/main" xmlns:r="http://schemas.openxmlformats.org/officeDocument/2006/relationships" xmlns:p="http://schemas.openxmlformats.org/presentationml/2006/main">
+  <p:cSld>
+    <p:spTree>
+      <p:nvGrpSpPr>
+        <p:cNvPr id="1" name=""/>
+        <p:cNvGrpSpPr/>
+        <p:nvPr/>
+      </p:nvGrpSpPr>
+      <p:grpSpPr>
+        <a:xfrm>
+          <a:off x="0" y="0"/>
+          <a:ext cx="0" cy="0"/>
+          <a:chOff x="0" y="0"/>
+          <a:chExt cx="0" cy="0"/>
+        </a:xfrm>
+      </p:grpSpPr>
+      <p:sp>
+        <p:nvSpPr>
+          <p:cNvPr id="2" name="Espace réservé de l'image des diapositives 1"/>
+          <p:cNvSpPr>
+            <a:spLocks noGrp="1" noRot="1" noChangeAspect="1"/>
+          </p:cNvSpPr>
+          <p:nvPr>
+            <p:ph type="sldImg"/>
+          </p:nvPr>
+        </p:nvSpPr>
+        <p:spPr>
+          <a:xfrm>
+            <a:off x="877888" y="733425"/>
+            <a:ext cx="4892675" cy="3670300"/>
+          </a:xfrm>
+        </p:spPr>
+      </p:sp>
+      <p:sp>
+        <p:nvSpPr>
+          <p:cNvPr id="3" name="Espace réservé des notes 2"/>
+          <p:cNvSpPr>
+            <a:spLocks noGrp="1"/>
+          </p:cNvSpPr>
+          <p:nvPr>
+            <p:ph type="body" idx="1"/>
+          </p:nvPr>
+        </p:nvSpPr>
+        <p:spPr/>
+        <p:txBody>
+          <a:bodyPr/>
+          <a:lstStyle/>
+          <a:p>
+            <a:endParaRPr lang="fr-FR" dirty="0"/>
+          </a:p>
+        </p:txBody>
+      </p:sp>
+      <p:sp>
+        <p:nvSpPr>
+          <p:cNvPr id="4" name="Espace réservé du pied de page 3"/>
+          <p:cNvSpPr>
+            <a:spLocks noGrp="1"/>
+          </p:cNvSpPr>
+          <p:nvPr>
+            <p:ph type="ftr" sz="quarter" idx="4"/>
+          </p:nvPr>
+        </p:nvSpPr>
+        <p:spPr/>
+        <p:txBody>
+          <a:bodyPr/>
+          <a:lstStyle/>
+          <a:p>
+            <a:pPr>
+              <a:defRPr/>
+            </a:pPr>
+            <a:r>
+              <a:rPr lang="fr-FR"/>
+              <a:t>© HANDSHAKE - Philippe MASINA</a:t>
+            </a:r>
+          </a:p>
+        </p:txBody>
+      </p:sp>
+      <p:sp>
+        <p:nvSpPr>
+          <p:cNvPr id="5" name="Espace réservé du numéro de diapositive 4"/>
+          <p:cNvSpPr>
+            <a:spLocks noGrp="1"/>
+          </p:cNvSpPr>
+          <p:nvPr>
+            <p:ph type="sldNum" sz="quarter" idx="5"/>
+          </p:nvPr>
+        </p:nvSpPr>
+        <p:spPr/>
+        <p:txBody>
+          <a:bodyPr/>
+          <a:lstStyle/>
+          <a:p>
+            <a:pPr>
+              <a:defRPr/>
+            </a:pPr>
+            <a:r>
+              <a:rPr lang="fr-FR"/>
+              <a:t>I-</a:t>
+            </a:r>
+            <a:fld id="{88B410AF-14E7-4D87-8C8E-6E377E0C2388}" type="slidenum">
+              <a:rPr lang="fr-FR" smtClean="0"/>
+              <a:pPr>
+                <a:defRPr/>
+              </a:pPr>
+              <a:t>7</a:t>
+            </a:fld>
+            <a:endParaRPr lang="fr-FR"/>
+          </a:p>
+        </p:txBody>
+      </p:sp>
+    </p:spTree>
+    <p:extLst>
+      <p:ext uri="{BB962C8B-B14F-4D97-AF65-F5344CB8AC3E}">
+        <p14:creationId xmlns:p14="http://schemas.microsoft.com/office/powerpoint/2010/main" val="1097996959"/>
+      </p:ext>
+    </p:extLst>
+  </p:cSld>
+  <p:clrMapOvr>
+    <a:masterClrMapping/>
+  </p:clrMapOvr>
+</p:notes>
 </file>
 
 <file path=ppt/slideLayouts/slideLayout1.xml><?xml version="1.0" encoding="utf-8"?>
@@ -3767,6 +3903,725 @@
 </p:sld>
 </file>
 
+<file path=ppt/slides/slide10.xml><?xml version="1.0" encoding="utf-8"?>
+<p:sld xmlns:a="http://schemas.openxmlformats.org/drawingml/2006/main" xmlns:r="http://schemas.openxmlformats.org/officeDocument/2006/relationships" xmlns:p="http://schemas.openxmlformats.org/presentationml/2006/main">
+  <p:cSld>
+    <p:spTree>
+      <p:nvGrpSpPr>
+        <p:cNvPr id="1" name=""/>
+        <p:cNvGrpSpPr/>
+        <p:nvPr/>
+      </p:nvGrpSpPr>
+      <p:grpSpPr>
+        <a:xfrm>
+          <a:off x="0" y="0"/>
+          <a:ext cx="0" cy="0"/>
+          <a:chOff x="0" y="0"/>
+          <a:chExt cx="0" cy="0"/>
+        </a:xfrm>
+      </p:grpSpPr>
+      <p:sp>
+        <p:nvSpPr>
+          <p:cNvPr id="2" name="Titre 1"/>
+          <p:cNvSpPr>
+            <a:spLocks noGrp="1"/>
+          </p:cNvSpPr>
+          <p:nvPr>
+            <p:ph type="title"/>
+          </p:nvPr>
+        </p:nvSpPr>
+        <p:spPr/>
+        <p:txBody>
+          <a:bodyPr/>
+          <a:lstStyle/>
+          <a:p>
+            <a:r>
+              <a:rPr lang="fr-FR" dirty="0"/>
+              <a:t>Changement du poids</a:t>
+            </a:r>
+          </a:p>
+        </p:txBody>
+      </p:sp>
+      <p:sp>
+        <p:nvSpPr>
+          <p:cNvPr id="3" name="Espace réservé du contenu 2"/>
+          <p:cNvSpPr>
+            <a:spLocks noGrp="1"/>
+          </p:cNvSpPr>
+          <p:nvPr>
+            <p:ph idx="1"/>
+          </p:nvPr>
+        </p:nvSpPr>
+        <p:spPr/>
+        <p:txBody>
+          <a:bodyPr/>
+          <a:lstStyle/>
+          <a:p>
+            <a:r>
+              <a:rPr lang="fr-FR" dirty="0"/>
+              <a:t>Changement du poids</a:t>
+            </a:r>
+          </a:p>
+          <a:p>
+            <a:pPr lvl="1"/>
+            <a:r>
+              <a:rPr lang="fr-FR" dirty="0"/>
+              <a:t>Algorithme RMS</a:t>
+            </a:r>
+          </a:p>
+          <a:p>
+            <a:pPr lvl="1"/>
+            <a:r>
+              <a:rPr lang="fr-FR" dirty="0" err="1"/>
+              <a:t>dW</a:t>
+            </a:r>
+            <a:r>
+              <a:rPr lang="fr-FR" dirty="0"/>
+              <a:t> = </a:t>
+            </a:r>
+            <a:r>
+              <a:rPr lang="fr-FR" dirty="0" err="1"/>
+              <a:t>learningrate</a:t>
+            </a:r>
+            <a:r>
+              <a:rPr lang="fr-FR" dirty="0"/>
+              <a:t> * gradient(</a:t>
+            </a:r>
+            <a:r>
+              <a:rPr lang="fr-FR" dirty="0" err="1"/>
+              <a:t>loss</a:t>
+            </a:r>
+            <a:r>
+              <a:rPr lang="fr-FR" dirty="0"/>
+              <a:t>)</a:t>
+            </a:r>
+          </a:p>
+        </p:txBody>
+      </p:sp>
+      <p:pic>
+        <p:nvPicPr>
+          <p:cNvPr id="7170" name="Picture 2" descr="https://miro.medium.com/max/1500/0*oqm7QVnI9-inFGCc.gif"/>
+          <p:cNvPicPr>
+            <a:picLocks noChangeAspect="1" noChangeArrowheads="1" noCrop="1"/>
+          </p:cNvPicPr>
+          <p:nvPr/>
+        </p:nvPicPr>
+        <p:blipFill>
+          <a:blip r:embed="rId2">
+            <a:extLst>
+              <a:ext uri="{28A0092B-C50C-407E-A947-70E740481C1C}">
+                <a14:useLocalDpi xmlns:a14="http://schemas.microsoft.com/office/drawing/2010/main" val="0"/>
+              </a:ext>
+            </a:extLst>
+          </a:blip>
+          <a:srcRect/>
+          <a:stretch>
+            <a:fillRect/>
+          </a:stretch>
+        </p:blipFill>
+        <p:spPr bwMode="auto">
+          <a:xfrm>
+            <a:off x="611560" y="3212976"/>
+            <a:ext cx="6768752" cy="2651095"/>
+          </a:xfrm>
+          <a:prstGeom prst="rect">
+            <a:avLst/>
+          </a:prstGeom>
+          <a:noFill/>
+          <a:extLst>
+            <a:ext uri="{909E8E84-426E-40DD-AFC4-6F175D3DCCD1}">
+              <a14:hiddenFill xmlns:a14="http://schemas.microsoft.com/office/drawing/2010/main">
+                <a:solidFill>
+                  <a:srgbClr val="FFFFFF"/>
+                </a:solidFill>
+              </a14:hiddenFill>
+            </a:ext>
+          </a:extLst>
+        </p:spPr>
+      </p:pic>
+    </p:spTree>
+    <p:extLst>
+      <p:ext uri="{BB962C8B-B14F-4D97-AF65-F5344CB8AC3E}">
+        <p14:creationId xmlns:p14="http://schemas.microsoft.com/office/powerpoint/2010/main" val="540926501"/>
+      </p:ext>
+    </p:extLst>
+  </p:cSld>
+  <p:clrMapOvr>
+    <a:masterClrMapping/>
+  </p:clrMapOvr>
+</p:sld>
+</file>
+
+<file path=ppt/slides/slide11.xml><?xml version="1.0" encoding="utf-8"?>
+<p:sld xmlns:a="http://schemas.openxmlformats.org/drawingml/2006/main" xmlns:r="http://schemas.openxmlformats.org/officeDocument/2006/relationships" xmlns:p="http://schemas.openxmlformats.org/presentationml/2006/main">
+  <p:cSld>
+    <p:spTree>
+      <p:nvGrpSpPr>
+        <p:cNvPr id="1" name=""/>
+        <p:cNvGrpSpPr/>
+        <p:nvPr/>
+      </p:nvGrpSpPr>
+      <p:grpSpPr>
+        <a:xfrm>
+          <a:off x="0" y="0"/>
+          <a:ext cx="0" cy="0"/>
+          <a:chOff x="0" y="0"/>
+          <a:chExt cx="0" cy="0"/>
+        </a:xfrm>
+      </p:grpSpPr>
+      <p:sp>
+        <p:nvSpPr>
+          <p:cNvPr id="2" name="Titre 1"/>
+          <p:cNvSpPr>
+            <a:spLocks noGrp="1"/>
+          </p:cNvSpPr>
+          <p:nvPr>
+            <p:ph type="title"/>
+          </p:nvPr>
+        </p:nvSpPr>
+        <p:spPr/>
+        <p:txBody>
+          <a:bodyPr/>
+          <a:lstStyle/>
+          <a:p>
+            <a:r>
+              <a:rPr lang="fr-FR" dirty="0"/>
+              <a:t>Learning rate</a:t>
+            </a:r>
+          </a:p>
+        </p:txBody>
+      </p:sp>
+      <p:sp>
+        <p:nvSpPr>
+          <p:cNvPr id="3" name="Espace réservé du contenu 2"/>
+          <p:cNvSpPr>
+            <a:spLocks noGrp="1"/>
+          </p:cNvSpPr>
+          <p:nvPr>
+            <p:ph idx="1"/>
+          </p:nvPr>
+        </p:nvSpPr>
+        <p:spPr/>
+        <p:txBody>
+          <a:bodyPr/>
+          <a:lstStyle/>
+          <a:p>
+            <a:r>
+              <a:rPr lang="fr-FR" dirty="0"/>
+              <a:t>Le taux d’apprentissage résout le problème des minimums locaux</a:t>
+            </a:r>
+          </a:p>
+          <a:p>
+            <a:pPr lvl="1"/>
+            <a:r>
+              <a:rPr lang="fr-FR" dirty="0"/>
+              <a:t>Entre 0.01 et 0.00001</a:t>
+            </a:r>
+          </a:p>
+        </p:txBody>
+      </p:sp>
+      <p:pic>
+        <p:nvPicPr>
+          <p:cNvPr id="13314" name="Picture 2" descr="https://miro.medium.com/max/700/0*G8a4jCsMLJ7xNQNt.png"/>
+          <p:cNvPicPr>
+            <a:picLocks noChangeAspect="1" noChangeArrowheads="1"/>
+          </p:cNvPicPr>
+          <p:nvPr/>
+        </p:nvPicPr>
+        <p:blipFill>
+          <a:blip r:embed="rId2">
+            <a:extLst>
+              <a:ext uri="{28A0092B-C50C-407E-A947-70E740481C1C}">
+                <a14:useLocalDpi xmlns:a14="http://schemas.microsoft.com/office/drawing/2010/main" val="0"/>
+              </a:ext>
+            </a:extLst>
+          </a:blip>
+          <a:srcRect/>
+          <a:stretch>
+            <a:fillRect/>
+          </a:stretch>
+        </p:blipFill>
+        <p:spPr bwMode="auto">
+          <a:xfrm>
+            <a:off x="5825282" y="1772816"/>
+            <a:ext cx="3120281" cy="2340211"/>
+          </a:xfrm>
+          <a:prstGeom prst="rect">
+            <a:avLst/>
+          </a:prstGeom>
+          <a:noFill/>
+          <a:extLst>
+            <a:ext uri="{909E8E84-426E-40DD-AFC4-6F175D3DCCD1}">
+              <a14:hiddenFill xmlns:a14="http://schemas.microsoft.com/office/drawing/2010/main">
+                <a:solidFill>
+                  <a:srgbClr val="FFFFFF"/>
+                </a:solidFill>
+              </a14:hiddenFill>
+            </a:ext>
+          </a:extLst>
+        </p:spPr>
+      </p:pic>
+      <p:pic>
+        <p:nvPicPr>
+          <p:cNvPr id="13316" name="Picture 4" descr="Image result for gradient descent"/>
+          <p:cNvPicPr>
+            <a:picLocks noChangeAspect="1" noChangeArrowheads="1"/>
+          </p:cNvPicPr>
+          <p:nvPr/>
+        </p:nvPicPr>
+        <p:blipFill>
+          <a:blip r:embed="rId3" cstate="print">
+            <a:extLst>
+              <a:ext uri="{28A0092B-C50C-407E-A947-70E740481C1C}">
+                <a14:useLocalDpi xmlns:a14="http://schemas.microsoft.com/office/drawing/2010/main" val="0"/>
+              </a:ext>
+            </a:extLst>
+          </a:blip>
+          <a:srcRect/>
+          <a:stretch>
+            <a:fillRect/>
+          </a:stretch>
+        </p:blipFill>
+        <p:spPr bwMode="auto">
+          <a:xfrm>
+            <a:off x="899592" y="3501008"/>
+            <a:ext cx="4577354" cy="2141810"/>
+          </a:xfrm>
+          <a:prstGeom prst="rect">
+            <a:avLst/>
+          </a:prstGeom>
+          <a:noFill/>
+          <a:extLst>
+            <a:ext uri="{909E8E84-426E-40DD-AFC4-6F175D3DCCD1}">
+              <a14:hiddenFill xmlns:a14="http://schemas.microsoft.com/office/drawing/2010/main">
+                <a:solidFill>
+                  <a:srgbClr val="FFFFFF"/>
+                </a:solidFill>
+              </a14:hiddenFill>
+            </a:ext>
+          </a:extLst>
+        </p:spPr>
+      </p:pic>
+    </p:spTree>
+    <p:extLst>
+      <p:ext uri="{BB962C8B-B14F-4D97-AF65-F5344CB8AC3E}">
+        <p14:creationId xmlns:p14="http://schemas.microsoft.com/office/powerpoint/2010/main" val="3830766788"/>
+      </p:ext>
+    </p:extLst>
+  </p:cSld>
+  <p:clrMapOvr>
+    <a:masterClrMapping/>
+  </p:clrMapOvr>
+</p:sld>
+</file>
+
+<file path=ppt/slides/slide12.xml><?xml version="1.0" encoding="utf-8"?>
+<p:sld xmlns:a="http://schemas.openxmlformats.org/drawingml/2006/main" xmlns:r="http://schemas.openxmlformats.org/officeDocument/2006/relationships" xmlns:p="http://schemas.openxmlformats.org/presentationml/2006/main">
+  <p:cSld>
+    <p:spTree>
+      <p:nvGrpSpPr>
+        <p:cNvPr id="1" name=""/>
+        <p:cNvGrpSpPr/>
+        <p:nvPr/>
+      </p:nvGrpSpPr>
+      <p:grpSpPr>
+        <a:xfrm>
+          <a:off x="0" y="0"/>
+          <a:ext cx="0" cy="0"/>
+          <a:chOff x="0" y="0"/>
+          <a:chExt cx="0" cy="0"/>
+        </a:xfrm>
+      </p:grpSpPr>
+      <p:sp>
+        <p:nvSpPr>
+          <p:cNvPr id="2" name="Titre 1"/>
+          <p:cNvSpPr>
+            <a:spLocks noGrp="1"/>
+          </p:cNvSpPr>
+          <p:nvPr>
+            <p:ph type="title"/>
+          </p:nvPr>
+        </p:nvSpPr>
+        <p:spPr/>
+        <p:txBody>
+          <a:bodyPr/>
+          <a:lstStyle/>
+          <a:p>
+            <a:r>
+              <a:rPr lang="fr-FR" dirty="0" err="1"/>
+              <a:t>Backpropagation</a:t>
+            </a:r>
+            <a:endParaRPr lang="fr-FR" dirty="0"/>
+          </a:p>
+        </p:txBody>
+      </p:sp>
+      <p:pic>
+        <p:nvPicPr>
+          <p:cNvPr id="4098" name="Picture 2" descr="https://dpzbhybb2pdcj.cloudfront.net/allaire/Figures/01fig09.jpg"/>
+          <p:cNvPicPr>
+            <a:picLocks noGrp="1" noChangeAspect="1" noChangeArrowheads="1"/>
+          </p:cNvPicPr>
+          <p:nvPr>
+            <p:ph idx="1"/>
+          </p:nvPr>
+        </p:nvPicPr>
+        <p:blipFill>
+          <a:blip r:embed="rId2">
+            <a:extLst>
+              <a:ext uri="{28A0092B-C50C-407E-A947-70E740481C1C}">
+                <a14:useLocalDpi xmlns:a14="http://schemas.microsoft.com/office/drawing/2010/main" val="0"/>
+              </a:ext>
+            </a:extLst>
+          </a:blip>
+          <a:srcRect/>
+          <a:stretch>
+            <a:fillRect/>
+          </a:stretch>
+        </p:blipFill>
+        <p:spPr bwMode="auto">
+          <a:xfrm>
+            <a:off x="2798341" y="1772816"/>
+            <a:ext cx="4608512" cy="3657214"/>
+          </a:xfrm>
+          <a:prstGeom prst="rect">
+            <a:avLst/>
+          </a:prstGeom>
+          <a:noFill/>
+          <a:extLst>
+            <a:ext uri="{909E8E84-426E-40DD-AFC4-6F175D3DCCD1}">
+              <a14:hiddenFill xmlns:a14="http://schemas.microsoft.com/office/drawing/2010/main">
+                <a:solidFill>
+                  <a:srgbClr val="FFFFFF"/>
+                </a:solidFill>
+              </a14:hiddenFill>
+            </a:ext>
+          </a:extLst>
+        </p:spPr>
+      </p:pic>
+    </p:spTree>
+    <p:extLst>
+      <p:ext uri="{BB962C8B-B14F-4D97-AF65-F5344CB8AC3E}">
+        <p14:creationId xmlns:p14="http://schemas.microsoft.com/office/powerpoint/2010/main" val="2578929874"/>
+      </p:ext>
+    </p:extLst>
+  </p:cSld>
+  <p:clrMapOvr>
+    <a:masterClrMapping/>
+  </p:clrMapOvr>
+</p:sld>
+</file>
+
+<file path=ppt/slides/slide13.xml><?xml version="1.0" encoding="utf-8"?>
+<p:sld xmlns:a="http://schemas.openxmlformats.org/drawingml/2006/main" xmlns:r="http://schemas.openxmlformats.org/officeDocument/2006/relationships" xmlns:p="http://schemas.openxmlformats.org/presentationml/2006/main">
+  <p:cSld>
+    <p:spTree>
+      <p:nvGrpSpPr>
+        <p:cNvPr id="1" name=""/>
+        <p:cNvGrpSpPr/>
+        <p:nvPr/>
+      </p:nvGrpSpPr>
+      <p:grpSpPr>
+        <a:xfrm>
+          <a:off x="0" y="0"/>
+          <a:ext cx="0" cy="0"/>
+          <a:chOff x="0" y="0"/>
+          <a:chExt cx="0" cy="0"/>
+        </a:xfrm>
+      </p:grpSpPr>
+      <p:sp>
+        <p:nvSpPr>
+          <p:cNvPr id="2" name="Titre 1"/>
+          <p:cNvSpPr>
+            <a:spLocks noGrp="1"/>
+          </p:cNvSpPr>
+          <p:nvPr>
+            <p:ph type="title"/>
+          </p:nvPr>
+        </p:nvSpPr>
+        <p:spPr/>
+        <p:txBody>
+          <a:bodyPr/>
+          <a:lstStyle/>
+          <a:p>
+            <a:r>
+              <a:rPr lang="fr-FR" dirty="0"/>
+              <a:t>MLP Complexes</a:t>
+            </a:r>
+          </a:p>
+        </p:txBody>
+      </p:sp>
+      <p:sp>
+        <p:nvSpPr>
+          <p:cNvPr id="3" name="Espace réservé du contenu 2"/>
+          <p:cNvSpPr>
+            <a:spLocks noGrp="1"/>
+          </p:cNvSpPr>
+          <p:nvPr>
+            <p:ph idx="1"/>
+          </p:nvPr>
+        </p:nvSpPr>
+        <p:spPr/>
+        <p:txBody>
+          <a:bodyPr/>
+          <a:lstStyle/>
+          <a:p>
+            <a:r>
+              <a:rPr lang="fr-FR" dirty="0"/>
+              <a:t>Les réseaux peuvent être complexes</a:t>
+            </a:r>
+          </a:p>
+        </p:txBody>
+      </p:sp>
+      <p:pic>
+        <p:nvPicPr>
+          <p:cNvPr id="4" name="Picture 16" descr="Résultat de recherche d'images pour &quot;multi layer perceptron inference animated gif&quot;"/>
+          <p:cNvPicPr>
+            <a:picLocks noChangeAspect="1" noChangeArrowheads="1"/>
+          </p:cNvPicPr>
+          <p:nvPr/>
+        </p:nvPicPr>
+        <p:blipFill>
+          <a:blip r:embed="rId2">
+            <a:extLst>
+              <a:ext uri="{28A0092B-C50C-407E-A947-70E740481C1C}">
+                <a14:useLocalDpi xmlns:a14="http://schemas.microsoft.com/office/drawing/2010/main" val="0"/>
+              </a:ext>
+            </a:extLst>
+          </a:blip>
+          <a:srcRect/>
+          <a:stretch>
+            <a:fillRect/>
+          </a:stretch>
+        </p:blipFill>
+        <p:spPr bwMode="auto">
+          <a:xfrm>
+            <a:off x="1979712" y="1916832"/>
+            <a:ext cx="5273934" cy="4428753"/>
+          </a:xfrm>
+          <a:prstGeom prst="rect">
+            <a:avLst/>
+          </a:prstGeom>
+          <a:noFill/>
+          <a:extLst>
+            <a:ext uri="{909E8E84-426E-40DD-AFC4-6F175D3DCCD1}">
+              <a14:hiddenFill xmlns:a14="http://schemas.microsoft.com/office/drawing/2010/main">
+                <a:solidFill>
+                  <a:srgbClr val="FFFFFF"/>
+                </a:solidFill>
+              </a14:hiddenFill>
+            </a:ext>
+          </a:extLst>
+        </p:spPr>
+      </p:pic>
+    </p:spTree>
+    <p:extLst>
+      <p:ext uri="{BB962C8B-B14F-4D97-AF65-F5344CB8AC3E}">
+        <p14:creationId xmlns:p14="http://schemas.microsoft.com/office/powerpoint/2010/main" val="651947342"/>
+      </p:ext>
+    </p:extLst>
+  </p:cSld>
+  <p:clrMapOvr>
+    <a:masterClrMapping/>
+  </p:clrMapOvr>
+</p:sld>
+</file>
+
+<file path=ppt/slides/slide14.xml><?xml version="1.0" encoding="utf-8"?>
+<p:sld xmlns:a="http://schemas.openxmlformats.org/drawingml/2006/main" xmlns:r="http://schemas.openxmlformats.org/officeDocument/2006/relationships" xmlns:p="http://schemas.openxmlformats.org/presentationml/2006/main">
+  <p:cSld>
+    <p:spTree>
+      <p:nvGrpSpPr>
+        <p:cNvPr id="1" name=""/>
+        <p:cNvGrpSpPr/>
+        <p:nvPr/>
+      </p:nvGrpSpPr>
+      <p:grpSpPr>
+        <a:xfrm>
+          <a:off x="0" y="0"/>
+          <a:ext cx="0" cy="0"/>
+          <a:chOff x="0" y="0"/>
+          <a:chExt cx="0" cy="0"/>
+        </a:xfrm>
+      </p:grpSpPr>
+      <p:sp>
+        <p:nvSpPr>
+          <p:cNvPr id="2" name="Titre 1">
+            <a:extLst>
+              <a:ext uri="{FF2B5EF4-FFF2-40B4-BE49-F238E27FC236}">
+                <a16:creationId xmlns:a16="http://schemas.microsoft.com/office/drawing/2014/main" id="{7EDB26A2-249F-4AA1-8871-6813CCCD05CF}"/>
+              </a:ext>
+            </a:extLst>
+          </p:cNvPr>
+          <p:cNvSpPr>
+            <a:spLocks noGrp="1"/>
+          </p:cNvSpPr>
+          <p:nvPr>
+            <p:ph type="title"/>
+          </p:nvPr>
+        </p:nvSpPr>
+        <p:spPr/>
+        <p:txBody>
+          <a:bodyPr/>
+          <a:lstStyle/>
+          <a:p>
+            <a:r>
+              <a:rPr lang="fr-FR" dirty="0"/>
+              <a:t>Clonage du réseau</a:t>
+            </a:r>
+          </a:p>
+        </p:txBody>
+      </p:sp>
+      <p:sp>
+        <p:nvSpPr>
+          <p:cNvPr id="3" name="Espace réservé du contenu 2">
+            <a:extLst>
+              <a:ext uri="{FF2B5EF4-FFF2-40B4-BE49-F238E27FC236}">
+                <a16:creationId xmlns:a16="http://schemas.microsoft.com/office/drawing/2014/main" id="{F63A2EB4-5179-44D7-B4C1-8D3EFDF0E460}"/>
+              </a:ext>
+            </a:extLst>
+          </p:cNvPr>
+          <p:cNvSpPr>
+            <a:spLocks noGrp="1"/>
+          </p:cNvSpPr>
+          <p:nvPr>
+            <p:ph idx="1"/>
+          </p:nvPr>
+        </p:nvSpPr>
+        <p:spPr/>
+        <p:txBody>
+          <a:bodyPr/>
+          <a:lstStyle/>
+          <a:p>
+            <a:r>
+              <a:rPr lang="fr-FR" dirty="0"/>
+              <a:t>Il est possible de cloner et/ou modifier un réseau</a:t>
+            </a:r>
+          </a:p>
+          <a:p>
+            <a:r>
+              <a:rPr lang="fr-FR" dirty="0"/>
+              <a:t>Il est alors possible de transférer les poids</a:t>
+            </a:r>
+          </a:p>
+          <a:p>
+            <a:r>
+              <a:rPr lang="fr-FR" dirty="0"/>
+              <a:t>Le réentrainement total peut être long</a:t>
+            </a:r>
+          </a:p>
+        </p:txBody>
+      </p:sp>
+    </p:spTree>
+    <p:extLst>
+      <p:ext uri="{BB962C8B-B14F-4D97-AF65-F5344CB8AC3E}">
+        <p14:creationId xmlns:p14="http://schemas.microsoft.com/office/powerpoint/2010/main" val="3019606910"/>
+      </p:ext>
+    </p:extLst>
+  </p:cSld>
+  <p:clrMapOvr>
+    <a:masterClrMapping/>
+  </p:clrMapOvr>
+</p:sld>
+</file>
+
+<file path=ppt/slides/slide15.xml><?xml version="1.0" encoding="utf-8"?>
+<p:sld xmlns:a="http://schemas.openxmlformats.org/drawingml/2006/main" xmlns:r="http://schemas.openxmlformats.org/officeDocument/2006/relationships" xmlns:p="http://schemas.openxmlformats.org/presentationml/2006/main">
+  <p:cSld>
+    <p:spTree>
+      <p:nvGrpSpPr>
+        <p:cNvPr id="1" name=""/>
+        <p:cNvGrpSpPr/>
+        <p:nvPr/>
+      </p:nvGrpSpPr>
+      <p:grpSpPr>
+        <a:xfrm>
+          <a:off x="0" y="0"/>
+          <a:ext cx="0" cy="0"/>
+          <a:chOff x="0" y="0"/>
+          <a:chExt cx="0" cy="0"/>
+        </a:xfrm>
+      </p:grpSpPr>
+      <p:sp>
+        <p:nvSpPr>
+          <p:cNvPr id="2" name="Titre 1">
+            <a:extLst>
+              <a:ext uri="{FF2B5EF4-FFF2-40B4-BE49-F238E27FC236}">
+                <a16:creationId xmlns:a16="http://schemas.microsoft.com/office/drawing/2014/main" id="{1D4BB44D-E4CB-4243-92AC-CF91D144DA3D}"/>
+              </a:ext>
+            </a:extLst>
+          </p:cNvPr>
+          <p:cNvSpPr>
+            <a:spLocks noGrp="1"/>
+          </p:cNvSpPr>
+          <p:nvPr>
+            <p:ph type="title"/>
+          </p:nvPr>
+        </p:nvSpPr>
+        <p:spPr/>
+        <p:txBody>
+          <a:bodyPr/>
+          <a:lstStyle/>
+          <a:p>
+            <a:r>
+              <a:rPr lang="fr-FR" dirty="0"/>
+              <a:t>Réentrainement partiel</a:t>
+            </a:r>
+          </a:p>
+        </p:txBody>
+      </p:sp>
+      <p:sp>
+        <p:nvSpPr>
+          <p:cNvPr id="3" name="Espace réservé du contenu 2">
+            <a:extLst>
+              <a:ext uri="{FF2B5EF4-FFF2-40B4-BE49-F238E27FC236}">
+                <a16:creationId xmlns:a16="http://schemas.microsoft.com/office/drawing/2014/main" id="{8CEF0534-96E0-4462-8E0C-1E1C9198C00A}"/>
+              </a:ext>
+            </a:extLst>
+          </p:cNvPr>
+          <p:cNvSpPr>
+            <a:spLocks noGrp="1"/>
+          </p:cNvSpPr>
+          <p:nvPr>
+            <p:ph idx="1"/>
+          </p:nvPr>
+        </p:nvSpPr>
+        <p:spPr/>
+        <p:txBody>
+          <a:bodyPr/>
+          <a:lstStyle/>
+          <a:p>
+            <a:r>
+              <a:rPr lang="fr-FR" dirty="0"/>
+              <a:t>Certaines couches peuvent ne pas être réentraînées</a:t>
+            </a:r>
+          </a:p>
+          <a:p>
+            <a:r>
+              <a:rPr lang="fr-FR" dirty="0"/>
+              <a:t>La modification d'une couche nécessite le réentrainement des couches suivantes</a:t>
+            </a:r>
+          </a:p>
+          <a:p>
+            <a:endParaRPr lang="fr-FR" dirty="0"/>
+          </a:p>
+          <a:p>
+            <a:endParaRPr lang="fr-FR" dirty="0"/>
+          </a:p>
+        </p:txBody>
+      </p:sp>
+    </p:spTree>
+    <p:extLst>
+      <p:ext uri="{BB962C8B-B14F-4D97-AF65-F5344CB8AC3E}">
+        <p14:creationId xmlns:p14="http://schemas.microsoft.com/office/powerpoint/2010/main" val="878944495"/>
+      </p:ext>
+    </p:extLst>
+  </p:cSld>
+  <p:clrMapOvr>
+    <a:masterClrMapping/>
+  </p:clrMapOvr>
+</p:sld>
+</file>
+
 <file path=ppt/slides/slide2.xml><?xml version="1.0" encoding="utf-8"?>
 <p:sld xmlns:a="http://schemas.openxmlformats.org/drawingml/2006/main" xmlns:r="http://schemas.openxmlformats.org/officeDocument/2006/relationships" xmlns:p="http://schemas.openxmlformats.org/presentationml/2006/main">
   <p:cSld>
@@ -3943,14 +4798,14 @@
           <a:p>
             <a:r>
               <a:rPr lang="fr-FR" dirty="0"/>
-              <a:t>LE modèle peut être réentraîné avec VOS données afin d'intégrer les données</a:t>
+              <a:t>Le modèle peut être réentraîné avec VOS données afin d'intégrer les données</a:t>
             </a:r>
           </a:p>
           <a:p>
             <a:pPr lvl="1"/>
             <a:r>
               <a:rPr lang="fr-FR" dirty="0"/>
-              <a:t>Il n' aura plus besoin de RAG</a:t>
+              <a:t>Il n'aura plus besoin de RAG</a:t>
             </a:r>
           </a:p>
           <a:p>
@@ -3958,42 +4813,6 @@
             <a:r>
               <a:rPr lang="fr-FR" dirty="0"/>
               <a:t>Processus couteux</a:t>
-            </a:r>
-          </a:p>
-          <a:p>
-            <a:pPr lvl="1"/>
-            <a:r>
-              <a:rPr lang="fr-FR" dirty="0"/>
-              <a:t>Dangereux en cas de SaaS</a:t>
-            </a:r>
-          </a:p>
-          <a:p>
-            <a:r>
-              <a:rPr lang="fr-FR" dirty="0"/>
-              <a:t>Il n'y aura plus de gestion </a:t>
-            </a:r>
-            <a:r>
-              <a:rPr lang="fr-FR"/>
-              <a:t>du "Je </a:t>
-            </a:r>
-            <a:r>
-              <a:rPr lang="fr-FR" dirty="0"/>
-              <a:t>ne </a:t>
-            </a:r>
-            <a:r>
-              <a:rPr lang="fr-FR"/>
-              <a:t>sais pas" </a:t>
-            </a:r>
-            <a:r>
-              <a:rPr lang="fr-FR" dirty="0"/>
-              <a:t>et de la citation des sources</a:t>
-            </a:r>
-          </a:p>
-          <a:p>
-            <a:pPr lvl="1"/>
-            <a:r>
-              <a:rPr lang="fr-FR" dirty="0"/>
-              <a:t>Les requêtes seront en revanche plus petites</a:t>
             </a:r>
           </a:p>
         </p:txBody>
@@ -4002,6 +4821,858 @@
     <p:extLst>
       <p:ext uri="{BB962C8B-B14F-4D97-AF65-F5344CB8AC3E}">
         <p14:creationId xmlns:p14="http://schemas.microsoft.com/office/powerpoint/2010/main" val="1816486981"/>
+      </p:ext>
+    </p:extLst>
+  </p:cSld>
+  <p:clrMapOvr>
+    <a:masterClrMapping/>
+  </p:clrMapOvr>
+</p:sld>
+</file>
+
+<file path=ppt/slides/slide4.xml><?xml version="1.0" encoding="utf-8"?>
+<p:sld xmlns:a="http://schemas.openxmlformats.org/drawingml/2006/main" xmlns:r="http://schemas.openxmlformats.org/officeDocument/2006/relationships" xmlns:p="http://schemas.openxmlformats.org/presentationml/2006/main">
+  <p:cSld>
+    <p:spTree>
+      <p:nvGrpSpPr>
+        <p:cNvPr id="1" name=""/>
+        <p:cNvGrpSpPr/>
+        <p:nvPr/>
+      </p:nvGrpSpPr>
+      <p:grpSpPr>
+        <a:xfrm>
+          <a:off x="0" y="0"/>
+          <a:ext cx="0" cy="0"/>
+          <a:chOff x="0" y="0"/>
+          <a:chExt cx="0" cy="0"/>
+        </a:xfrm>
+      </p:grpSpPr>
+      <p:sp>
+        <p:nvSpPr>
+          <p:cNvPr id="2" name="Titre 1"/>
+          <p:cNvSpPr>
+            <a:spLocks noGrp="1"/>
+          </p:cNvSpPr>
+          <p:nvPr>
+            <p:ph type="title"/>
+          </p:nvPr>
+        </p:nvSpPr>
+        <p:spPr/>
+        <p:txBody>
+          <a:bodyPr/>
+          <a:lstStyle/>
+          <a:p>
+            <a:r>
+              <a:rPr lang="fr-FR"/>
+              <a:t>Neurone</a:t>
+            </a:r>
+          </a:p>
+        </p:txBody>
+      </p:sp>
+      <p:sp>
+        <p:nvSpPr>
+          <p:cNvPr id="3" name="Espace réservé du contenu 2"/>
+          <p:cNvSpPr>
+            <a:spLocks noGrp="1"/>
+          </p:cNvSpPr>
+          <p:nvPr>
+            <p:ph idx="1"/>
+          </p:nvPr>
+        </p:nvSpPr>
+        <p:spPr/>
+        <p:txBody>
+          <a:bodyPr/>
+          <a:lstStyle/>
+          <a:p>
+            <a:r>
+              <a:rPr lang="fr-FR" dirty="0"/>
+              <a:t>En biologie un neurone est une cellule connecté à d’autre neurones qui a la faculté de laisser passer ou non un courant électrique</a:t>
+            </a:r>
+          </a:p>
+          <a:p>
+            <a:pPr lvl="1"/>
+            <a:r>
+              <a:rPr lang="fr-FR" dirty="0"/>
+              <a:t>Sa modélisation mathématique est appelé perceptron</a:t>
+            </a:r>
+          </a:p>
+          <a:p>
+            <a:endParaRPr lang="fr-FR" dirty="0"/>
+          </a:p>
+        </p:txBody>
+      </p:sp>
+      <p:pic>
+        <p:nvPicPr>
+          <p:cNvPr id="6146" name="Picture 2" descr="RÃ©sultat de recherche d'images pour &quot;neurone&quot;"/>
+          <p:cNvPicPr>
+            <a:picLocks noChangeAspect="1" noChangeArrowheads="1"/>
+          </p:cNvPicPr>
+          <p:nvPr/>
+        </p:nvPicPr>
+        <p:blipFill>
+          <a:blip r:embed="rId2">
+            <a:extLst>
+              <a:ext uri="{28A0092B-C50C-407E-A947-70E740481C1C}">
+                <a14:useLocalDpi xmlns:a14="http://schemas.microsoft.com/office/drawing/2010/main" val="0"/>
+              </a:ext>
+            </a:extLst>
+          </a:blip>
+          <a:srcRect/>
+          <a:stretch>
+            <a:fillRect/>
+          </a:stretch>
+        </p:blipFill>
+        <p:spPr bwMode="auto">
+          <a:xfrm>
+            <a:off x="395536" y="3356992"/>
+            <a:ext cx="5184576" cy="2912774"/>
+          </a:xfrm>
+          <a:prstGeom prst="rect">
+            <a:avLst/>
+          </a:prstGeom>
+          <a:noFill/>
+          <a:extLst>
+            <a:ext uri="{909E8E84-426E-40DD-AFC4-6F175D3DCCD1}">
+              <a14:hiddenFill xmlns:a14="http://schemas.microsoft.com/office/drawing/2010/main">
+                <a:solidFill>
+                  <a:srgbClr val="FFFFFF"/>
+                </a:solidFill>
+              </a14:hiddenFill>
+            </a:ext>
+          </a:extLst>
+        </p:spPr>
+      </p:pic>
+    </p:spTree>
+    <p:extLst>
+      <p:ext uri="{BB962C8B-B14F-4D97-AF65-F5344CB8AC3E}">
+        <p14:creationId xmlns:p14="http://schemas.microsoft.com/office/powerpoint/2010/main" val="548719315"/>
+      </p:ext>
+    </p:extLst>
+  </p:cSld>
+  <p:clrMapOvr>
+    <a:masterClrMapping/>
+  </p:clrMapOvr>
+</p:sld>
+</file>
+
+<file path=ppt/slides/slide5.xml><?xml version="1.0" encoding="utf-8"?>
+<p:sld xmlns:a="http://schemas.openxmlformats.org/drawingml/2006/main" xmlns:r="http://schemas.openxmlformats.org/officeDocument/2006/relationships" xmlns:p="http://schemas.openxmlformats.org/presentationml/2006/main">
+  <p:cSld>
+    <p:spTree>
+      <p:nvGrpSpPr>
+        <p:cNvPr id="1" name=""/>
+        <p:cNvGrpSpPr/>
+        <p:nvPr/>
+      </p:nvGrpSpPr>
+      <p:grpSpPr>
+        <a:xfrm>
+          <a:off x="0" y="0"/>
+          <a:ext cx="0" cy="0"/>
+          <a:chOff x="0" y="0"/>
+          <a:chExt cx="0" cy="0"/>
+        </a:xfrm>
+      </p:grpSpPr>
+      <p:sp>
+        <p:nvSpPr>
+          <p:cNvPr id="2" name="Titre 1"/>
+          <p:cNvSpPr>
+            <a:spLocks noGrp="1"/>
+          </p:cNvSpPr>
+          <p:nvPr>
+            <p:ph type="title"/>
+          </p:nvPr>
+        </p:nvSpPr>
+        <p:spPr/>
+        <p:txBody>
+          <a:bodyPr/>
+          <a:lstStyle/>
+          <a:p>
+            <a:r>
+              <a:rPr lang="fr-FR" dirty="0"/>
+              <a:t>Synapse</a:t>
+            </a:r>
+          </a:p>
+        </p:txBody>
+      </p:sp>
+      <p:sp>
+        <p:nvSpPr>
+          <p:cNvPr id="3" name="Espace réservé du contenu 2"/>
+          <p:cNvSpPr>
+            <a:spLocks noGrp="1"/>
+          </p:cNvSpPr>
+          <p:nvPr>
+            <p:ph idx="1"/>
+          </p:nvPr>
+        </p:nvSpPr>
+        <p:spPr/>
+        <p:txBody>
+          <a:bodyPr/>
+          <a:lstStyle/>
+          <a:p>
+            <a:r>
+              <a:rPr lang="fr-FR" dirty="0"/>
+              <a:t>La liaison synaptique s’effectue par des neurotransmetteurs</a:t>
+            </a:r>
+          </a:p>
+          <a:p>
+            <a:endParaRPr lang="fr-FR" dirty="0"/>
+          </a:p>
+        </p:txBody>
+      </p:sp>
+      <p:pic>
+        <p:nvPicPr>
+          <p:cNvPr id="3074" name="Picture 2" descr="https://scr.sad.supinfo.com/articles/resources/214662/7923/0.png"/>
+          <p:cNvPicPr>
+            <a:picLocks noChangeAspect="1" noChangeArrowheads="1"/>
+          </p:cNvPicPr>
+          <p:nvPr/>
+        </p:nvPicPr>
+        <p:blipFill>
+          <a:blip r:embed="rId2">
+            <a:extLst>
+              <a:ext uri="{28A0092B-C50C-407E-A947-70E740481C1C}">
+                <a14:useLocalDpi xmlns:a14="http://schemas.microsoft.com/office/drawing/2010/main" val="0"/>
+              </a:ext>
+            </a:extLst>
+          </a:blip>
+          <a:srcRect/>
+          <a:stretch>
+            <a:fillRect/>
+          </a:stretch>
+        </p:blipFill>
+        <p:spPr bwMode="auto">
+          <a:xfrm>
+            <a:off x="1619672" y="3645024"/>
+            <a:ext cx="5724525" cy="1581151"/>
+          </a:xfrm>
+          <a:prstGeom prst="rect">
+            <a:avLst/>
+          </a:prstGeom>
+          <a:noFill/>
+          <a:extLst>
+            <a:ext uri="{909E8E84-426E-40DD-AFC4-6F175D3DCCD1}">
+              <a14:hiddenFill xmlns:a14="http://schemas.microsoft.com/office/drawing/2010/main">
+                <a:solidFill>
+                  <a:srgbClr val="FFFFFF"/>
+                </a:solidFill>
+              </a14:hiddenFill>
+            </a:ext>
+          </a:extLst>
+        </p:spPr>
+      </p:pic>
+    </p:spTree>
+    <p:extLst>
+      <p:ext uri="{BB962C8B-B14F-4D97-AF65-F5344CB8AC3E}">
+        <p14:creationId xmlns:p14="http://schemas.microsoft.com/office/powerpoint/2010/main" val="2196385036"/>
+      </p:ext>
+    </p:extLst>
+  </p:cSld>
+  <p:clrMapOvr>
+    <a:masterClrMapping/>
+  </p:clrMapOvr>
+</p:sld>
+</file>
+
+<file path=ppt/slides/slide6.xml><?xml version="1.0" encoding="utf-8"?>
+<p:sld xmlns:a="http://schemas.openxmlformats.org/drawingml/2006/main" xmlns:r="http://schemas.openxmlformats.org/officeDocument/2006/relationships" xmlns:p="http://schemas.openxmlformats.org/presentationml/2006/main">
+  <p:cSld>
+    <p:spTree>
+      <p:nvGrpSpPr>
+        <p:cNvPr id="1" name=""/>
+        <p:cNvGrpSpPr/>
+        <p:nvPr/>
+      </p:nvGrpSpPr>
+      <p:grpSpPr>
+        <a:xfrm>
+          <a:off x="0" y="0"/>
+          <a:ext cx="0" cy="0"/>
+          <a:chOff x="0" y="0"/>
+          <a:chExt cx="0" cy="0"/>
+        </a:xfrm>
+      </p:grpSpPr>
+      <p:sp>
+        <p:nvSpPr>
+          <p:cNvPr id="2" name="Titre 1"/>
+          <p:cNvSpPr>
+            <a:spLocks noGrp="1"/>
+          </p:cNvSpPr>
+          <p:nvPr>
+            <p:ph type="title"/>
+          </p:nvPr>
+        </p:nvSpPr>
+        <p:spPr/>
+        <p:txBody>
+          <a:bodyPr/>
+          <a:lstStyle/>
+          <a:p>
+            <a:r>
+              <a:rPr lang="fr-FR" dirty="0"/>
+              <a:t>Perceptron</a:t>
+            </a:r>
+          </a:p>
+        </p:txBody>
+      </p:sp>
+      <p:sp>
+        <p:nvSpPr>
+          <p:cNvPr id="3" name="Espace réservé du contenu 2"/>
+          <p:cNvSpPr>
+            <a:spLocks noGrp="1"/>
+          </p:cNvSpPr>
+          <p:nvPr>
+            <p:ph idx="1"/>
+          </p:nvPr>
+        </p:nvSpPr>
+        <p:spPr/>
+        <p:txBody>
+          <a:bodyPr/>
+          <a:lstStyle/>
+          <a:p>
+            <a:r>
+              <a:rPr lang="fr-FR" dirty="0"/>
+              <a:t>Un neurone possède plusieurs entrées (ix), une sortie (o), un seuil et une fonction d’activation (f)</a:t>
+            </a:r>
+          </a:p>
+          <a:p>
+            <a:r>
+              <a:rPr lang="fr-FR" dirty="0"/>
+              <a:t>Chaque entrée possède un poids (</a:t>
+            </a:r>
+            <a:r>
+              <a:rPr lang="fr-FR" dirty="0" err="1"/>
+              <a:t>Wx</a:t>
+            </a:r>
+            <a:r>
+              <a:rPr lang="fr-FR" dirty="0"/>
+              <a:t>)</a:t>
+            </a:r>
+          </a:p>
+          <a:p>
+            <a:endParaRPr lang="fr-FR" dirty="0"/>
+          </a:p>
+        </p:txBody>
+      </p:sp>
+      <p:pic>
+        <p:nvPicPr>
+          <p:cNvPr id="1026" name="Picture 2" descr="Schéma d'un perceptron à n entrées."/>
+          <p:cNvPicPr>
+            <a:picLocks noChangeAspect="1" noChangeArrowheads="1"/>
+          </p:cNvPicPr>
+          <p:nvPr/>
+        </p:nvPicPr>
+        <p:blipFill>
+          <a:blip r:embed="rId2">
+            <a:extLst>
+              <a:ext uri="{28A0092B-C50C-407E-A947-70E740481C1C}">
+                <a14:useLocalDpi xmlns:a14="http://schemas.microsoft.com/office/drawing/2010/main" val="0"/>
+              </a:ext>
+            </a:extLst>
+          </a:blip>
+          <a:srcRect/>
+          <a:stretch>
+            <a:fillRect/>
+          </a:stretch>
+        </p:blipFill>
+        <p:spPr bwMode="auto">
+          <a:xfrm>
+            <a:off x="1216473" y="2719205"/>
+            <a:ext cx="5640561" cy="3990698"/>
+          </a:xfrm>
+          <a:prstGeom prst="rect">
+            <a:avLst/>
+          </a:prstGeom>
+          <a:noFill/>
+          <a:extLst>
+            <a:ext uri="{909E8E84-426E-40DD-AFC4-6F175D3DCCD1}">
+              <a14:hiddenFill xmlns:a14="http://schemas.microsoft.com/office/drawing/2010/main">
+                <a:solidFill>
+                  <a:srgbClr val="FFFFFF"/>
+                </a:solidFill>
+              </a14:hiddenFill>
+            </a:ext>
+          </a:extLst>
+        </p:spPr>
+      </p:pic>
+    </p:spTree>
+    <p:extLst>
+      <p:ext uri="{BB962C8B-B14F-4D97-AF65-F5344CB8AC3E}">
+        <p14:creationId xmlns:p14="http://schemas.microsoft.com/office/powerpoint/2010/main" val="176497300"/>
+      </p:ext>
+    </p:extLst>
+  </p:cSld>
+  <p:clrMapOvr>
+    <a:masterClrMapping/>
+  </p:clrMapOvr>
+</p:sld>
+</file>
+
+<file path=ppt/slides/slide7.xml><?xml version="1.0" encoding="utf-8"?>
+<p:sld xmlns:a="http://schemas.openxmlformats.org/drawingml/2006/main" xmlns:r="http://schemas.openxmlformats.org/officeDocument/2006/relationships" xmlns:p="http://schemas.openxmlformats.org/presentationml/2006/main">
+  <p:cSld>
+    <p:spTree>
+      <p:nvGrpSpPr>
+        <p:cNvPr id="1" name=""/>
+        <p:cNvGrpSpPr/>
+        <p:nvPr/>
+      </p:nvGrpSpPr>
+      <p:grpSpPr>
+        <a:xfrm>
+          <a:off x="0" y="0"/>
+          <a:ext cx="0" cy="0"/>
+          <a:chOff x="0" y="0"/>
+          <a:chExt cx="0" cy="0"/>
+        </a:xfrm>
+      </p:grpSpPr>
+      <p:sp>
+        <p:nvSpPr>
+          <p:cNvPr id="2" name="Titre 1"/>
+          <p:cNvSpPr>
+            <a:spLocks noGrp="1"/>
+          </p:cNvSpPr>
+          <p:nvPr>
+            <p:ph type="title"/>
+          </p:nvPr>
+        </p:nvSpPr>
+        <p:spPr/>
+        <p:txBody>
+          <a:bodyPr/>
+          <a:lstStyle/>
+          <a:p>
+            <a:r>
+              <a:rPr lang="fr-FR" dirty="0"/>
+              <a:t>MLP</a:t>
+            </a:r>
+          </a:p>
+        </p:txBody>
+      </p:sp>
+      <p:sp>
+        <p:nvSpPr>
+          <p:cNvPr id="3" name="Espace réservé du contenu 2"/>
+          <p:cNvSpPr>
+            <a:spLocks noGrp="1"/>
+          </p:cNvSpPr>
+          <p:nvPr>
+            <p:ph idx="1"/>
+          </p:nvPr>
+        </p:nvSpPr>
+        <p:spPr/>
+        <p:txBody>
+          <a:bodyPr/>
+          <a:lstStyle/>
+          <a:p>
+            <a:r>
+              <a:rPr lang="fr-FR" dirty="0"/>
+              <a:t>Multi Layer Perceptron</a:t>
+            </a:r>
+          </a:p>
+          <a:p>
+            <a:pPr lvl="1"/>
+            <a:r>
+              <a:rPr lang="fr-FR" dirty="0"/>
+              <a:t>Les perceptrons sont mis dans un graphe acyclique</a:t>
+            </a:r>
+          </a:p>
+        </p:txBody>
+      </p:sp>
+      <p:pic>
+        <p:nvPicPr>
+          <p:cNvPr id="4" name="Picture 12" descr="Résultat de recherche d'images pour &quot;mlp inference&quot;"/>
+          <p:cNvPicPr>
+            <a:picLocks noChangeAspect="1" noChangeArrowheads="1"/>
+          </p:cNvPicPr>
+          <p:nvPr/>
+        </p:nvPicPr>
+        <p:blipFill>
+          <a:blip r:embed="rId3" cstate="print">
+            <a:extLst>
+              <a:ext uri="{28A0092B-C50C-407E-A947-70E740481C1C}">
+                <a14:useLocalDpi xmlns:a14="http://schemas.microsoft.com/office/drawing/2010/main" val="0"/>
+              </a:ext>
+            </a:extLst>
+          </a:blip>
+          <a:srcRect/>
+          <a:stretch>
+            <a:fillRect/>
+          </a:stretch>
+        </p:blipFill>
+        <p:spPr bwMode="auto">
+          <a:xfrm>
+            <a:off x="2051720" y="2852936"/>
+            <a:ext cx="4804506" cy="3164895"/>
+          </a:xfrm>
+          <a:prstGeom prst="rect">
+            <a:avLst/>
+          </a:prstGeom>
+          <a:noFill/>
+          <a:extLst>
+            <a:ext uri="{909E8E84-426E-40DD-AFC4-6F175D3DCCD1}">
+              <a14:hiddenFill xmlns:a14="http://schemas.microsoft.com/office/drawing/2010/main">
+                <a:solidFill>
+                  <a:srgbClr val="FFFFFF"/>
+                </a:solidFill>
+              </a14:hiddenFill>
+            </a:ext>
+          </a:extLst>
+        </p:spPr>
+      </p:pic>
+      <p:sp>
+        <p:nvSpPr>
+          <p:cNvPr id="5" name="ZoneTexte 4">
+            <a:extLst>
+              <a:ext uri="{FF2B5EF4-FFF2-40B4-BE49-F238E27FC236}">
+                <a16:creationId xmlns:a16="http://schemas.microsoft.com/office/drawing/2014/main" id="{A993503B-2ED5-4061-88B8-420B4BF6AFFF}"/>
+              </a:ext>
+            </a:extLst>
+          </p:cNvPr>
+          <p:cNvSpPr txBox="1"/>
+          <p:nvPr/>
+        </p:nvSpPr>
+        <p:spPr>
+          <a:xfrm>
+            <a:off x="1043608" y="3356992"/>
+            <a:ext cx="869149" cy="1938992"/>
+          </a:xfrm>
+          <a:prstGeom prst="rect">
+            <a:avLst/>
+          </a:prstGeom>
+          <a:noFill/>
+        </p:spPr>
+        <p:txBody>
+          <a:bodyPr wrap="none" rtlCol="0">
+            <a:spAutoFit/>
+          </a:bodyPr>
+          <a:lstStyle/>
+          <a:p>
+            <a:r>
+              <a:rPr lang="fr-FR" dirty="0"/>
+              <a:t>1 4 7</a:t>
+            </a:r>
+          </a:p>
+          <a:p>
+            <a:endParaRPr lang="fr-FR" dirty="0"/>
+          </a:p>
+          <a:p>
+            <a:r>
+              <a:rPr lang="fr-FR" dirty="0"/>
+              <a:t>2 5 8</a:t>
+            </a:r>
+          </a:p>
+          <a:p>
+            <a:endParaRPr lang="fr-FR" dirty="0"/>
+          </a:p>
+          <a:p>
+            <a:r>
+              <a:rPr lang="fr-FR" dirty="0"/>
+              <a:t>3 6 9</a:t>
+            </a:r>
+          </a:p>
+        </p:txBody>
+      </p:sp>
+    </p:spTree>
+    <p:extLst>
+      <p:ext uri="{BB962C8B-B14F-4D97-AF65-F5344CB8AC3E}">
+        <p14:creationId xmlns:p14="http://schemas.microsoft.com/office/powerpoint/2010/main" val="1994866782"/>
+      </p:ext>
+    </p:extLst>
+  </p:cSld>
+  <p:clrMapOvr>
+    <a:masterClrMapping/>
+  </p:clrMapOvr>
+</p:sld>
+</file>
+
+<file path=ppt/slides/slide8.xml><?xml version="1.0" encoding="utf-8"?>
+<p:sld xmlns:a="http://schemas.openxmlformats.org/drawingml/2006/main" xmlns:r="http://schemas.openxmlformats.org/officeDocument/2006/relationships" xmlns:p="http://schemas.openxmlformats.org/presentationml/2006/main">
+  <p:cSld>
+    <p:spTree>
+      <p:nvGrpSpPr>
+        <p:cNvPr id="1" name=""/>
+        <p:cNvGrpSpPr/>
+        <p:nvPr/>
+      </p:nvGrpSpPr>
+      <p:grpSpPr>
+        <a:xfrm>
+          <a:off x="0" y="0"/>
+          <a:ext cx="0" cy="0"/>
+          <a:chOff x="0" y="0"/>
+          <a:chExt cx="0" cy="0"/>
+        </a:xfrm>
+      </p:grpSpPr>
+      <p:sp>
+        <p:nvSpPr>
+          <p:cNvPr id="2" name="Titre 1"/>
+          <p:cNvSpPr>
+            <a:spLocks noGrp="1"/>
+          </p:cNvSpPr>
+          <p:nvPr>
+            <p:ph type="title"/>
+          </p:nvPr>
+        </p:nvSpPr>
+        <p:spPr/>
+        <p:txBody>
+          <a:bodyPr/>
+          <a:lstStyle/>
+          <a:p>
+            <a:r>
+              <a:rPr lang="fr-FR" dirty="0"/>
+              <a:t>Exemple simple</a:t>
+            </a:r>
+          </a:p>
+        </p:txBody>
+      </p:sp>
+      <p:sp>
+        <p:nvSpPr>
+          <p:cNvPr id="3" name="Espace réservé du contenu 2"/>
+          <p:cNvSpPr>
+            <a:spLocks noGrp="1"/>
+          </p:cNvSpPr>
+          <p:nvPr>
+            <p:ph idx="1"/>
+          </p:nvPr>
+        </p:nvSpPr>
+        <p:spPr/>
+        <p:txBody>
+          <a:bodyPr/>
+          <a:lstStyle/>
+          <a:p>
+            <a:r>
+              <a:rPr lang="fr-FR" dirty="0"/>
+              <a:t>Réseau (2,2,2)</a:t>
+            </a:r>
+          </a:p>
+          <a:p>
+            <a:pPr lvl="1"/>
+            <a:r>
+              <a:rPr lang="fr-FR" dirty="0"/>
+              <a:t>2 inputs</a:t>
+            </a:r>
+          </a:p>
+          <a:p>
+            <a:pPr lvl="1"/>
+            <a:r>
+              <a:rPr lang="fr-FR" dirty="0"/>
+              <a:t>2 </a:t>
+            </a:r>
+            <a:r>
+              <a:rPr lang="fr-FR" dirty="0" err="1"/>
+              <a:t>hiddens</a:t>
+            </a:r>
+            <a:endParaRPr lang="fr-FR" dirty="0"/>
+          </a:p>
+          <a:p>
+            <a:pPr lvl="1"/>
+            <a:r>
+              <a:rPr lang="fr-FR" dirty="0"/>
+              <a:t>2 outputs</a:t>
+            </a:r>
+          </a:p>
+          <a:p>
+            <a:r>
+              <a:rPr lang="fr-FR" dirty="0"/>
+              <a:t>Input [0.05, 0.1]</a:t>
+            </a:r>
+          </a:p>
+          <a:p>
+            <a:r>
+              <a:rPr lang="fr-FR" dirty="0"/>
+              <a:t>Output </a:t>
+            </a:r>
+            <a:r>
+              <a:rPr lang="fr-FR" dirty="0" err="1"/>
+              <a:t>target</a:t>
+            </a:r>
+            <a:r>
+              <a:rPr lang="fr-FR" dirty="0"/>
+              <a:t> [0.01, 0.99]</a:t>
+            </a:r>
+          </a:p>
+          <a:p>
+            <a:r>
+              <a:rPr lang="fr-FR" dirty="0" err="1"/>
+              <a:t>wx</a:t>
+            </a:r>
+            <a:r>
+              <a:rPr lang="fr-FR" dirty="0"/>
+              <a:t> = Poids</a:t>
+            </a:r>
+          </a:p>
+          <a:p>
+            <a:r>
+              <a:rPr lang="fr-FR" dirty="0" err="1"/>
+              <a:t>bx</a:t>
+            </a:r>
+            <a:r>
+              <a:rPr lang="fr-FR" dirty="0"/>
+              <a:t> = </a:t>
+            </a:r>
+            <a:r>
+              <a:rPr lang="fr-FR" dirty="0" err="1"/>
+              <a:t>Bias</a:t>
+            </a:r>
+            <a:r>
+              <a:rPr lang="fr-FR" dirty="0"/>
+              <a:t> (seuils)</a:t>
+            </a:r>
+          </a:p>
+        </p:txBody>
+      </p:sp>
+      <p:pic>
+        <p:nvPicPr>
+          <p:cNvPr id="1028" name="Picture 4" descr="neural_network (9)"/>
+          <p:cNvPicPr>
+            <a:picLocks noChangeAspect="1" noChangeArrowheads="1"/>
+          </p:cNvPicPr>
+          <p:nvPr/>
+        </p:nvPicPr>
+        <p:blipFill>
+          <a:blip r:embed="rId2">
+            <a:extLst>
+              <a:ext uri="{28A0092B-C50C-407E-A947-70E740481C1C}">
+                <a14:useLocalDpi xmlns:a14="http://schemas.microsoft.com/office/drawing/2010/main" val="0"/>
+              </a:ext>
+            </a:extLst>
+          </a:blip>
+          <a:srcRect/>
+          <a:stretch>
+            <a:fillRect/>
+          </a:stretch>
+        </p:blipFill>
+        <p:spPr bwMode="auto">
+          <a:xfrm>
+            <a:off x="4562537" y="1556792"/>
+            <a:ext cx="4152900" cy="3533776"/>
+          </a:xfrm>
+          <a:prstGeom prst="rect">
+            <a:avLst/>
+          </a:prstGeom>
+          <a:noFill/>
+          <a:extLst>
+            <a:ext uri="{909E8E84-426E-40DD-AFC4-6F175D3DCCD1}">
+              <a14:hiddenFill xmlns:a14="http://schemas.microsoft.com/office/drawing/2010/main">
+                <a:solidFill>
+                  <a:srgbClr val="FFFFFF"/>
+                </a:solidFill>
+              </a14:hiddenFill>
+            </a:ext>
+          </a:extLst>
+        </p:spPr>
+      </p:pic>
+    </p:spTree>
+    <p:extLst>
+      <p:ext uri="{BB962C8B-B14F-4D97-AF65-F5344CB8AC3E}">
+        <p14:creationId xmlns:p14="http://schemas.microsoft.com/office/powerpoint/2010/main" val="3192940177"/>
+      </p:ext>
+    </p:extLst>
+  </p:cSld>
+  <p:clrMapOvr>
+    <a:masterClrMapping/>
+  </p:clrMapOvr>
+</p:sld>
+</file>
+
+<file path=ppt/slides/slide9.xml><?xml version="1.0" encoding="utf-8"?>
+<p:sld xmlns:a="http://schemas.openxmlformats.org/drawingml/2006/main" xmlns:r="http://schemas.openxmlformats.org/officeDocument/2006/relationships" xmlns:p="http://schemas.openxmlformats.org/presentationml/2006/main">
+  <p:cSld>
+    <p:spTree>
+      <p:nvGrpSpPr>
+        <p:cNvPr id="1" name=""/>
+        <p:cNvGrpSpPr/>
+        <p:nvPr/>
+      </p:nvGrpSpPr>
+      <p:grpSpPr>
+        <a:xfrm>
+          <a:off x="0" y="0"/>
+          <a:ext cx="0" cy="0"/>
+          <a:chOff x="0" y="0"/>
+          <a:chExt cx="0" cy="0"/>
+        </a:xfrm>
+      </p:grpSpPr>
+      <p:sp>
+        <p:nvSpPr>
+          <p:cNvPr id="2" name="Titre 1">
+            <a:extLst>
+              <a:ext uri="{FF2B5EF4-FFF2-40B4-BE49-F238E27FC236}">
+                <a16:creationId xmlns:a16="http://schemas.microsoft.com/office/drawing/2014/main" id="{C2C13282-F0EC-B6B9-620B-8E98B2FEAE5B}"/>
+              </a:ext>
+            </a:extLst>
+          </p:cNvPr>
+          <p:cNvSpPr>
+            <a:spLocks noGrp="1"/>
+          </p:cNvSpPr>
+          <p:nvPr>
+            <p:ph type="title"/>
+          </p:nvPr>
+        </p:nvSpPr>
+        <p:spPr/>
+        <p:txBody>
+          <a:bodyPr/>
+          <a:lstStyle/>
+          <a:p>
+            <a:r>
+              <a:rPr lang="fr-FR" dirty="0"/>
+              <a:t>Descente du gradient</a:t>
+            </a:r>
+          </a:p>
+        </p:txBody>
+      </p:sp>
+      <p:sp>
+        <p:nvSpPr>
+          <p:cNvPr id="3" name="Espace réservé du contenu 2">
+            <a:extLst>
+              <a:ext uri="{FF2B5EF4-FFF2-40B4-BE49-F238E27FC236}">
+                <a16:creationId xmlns:a16="http://schemas.microsoft.com/office/drawing/2014/main" id="{D39B14DB-1F36-B22E-72A4-3F81FF8BF490}"/>
+              </a:ext>
+            </a:extLst>
+          </p:cNvPr>
+          <p:cNvSpPr>
+            <a:spLocks noGrp="1"/>
+          </p:cNvSpPr>
+          <p:nvPr>
+            <p:ph idx="1"/>
+          </p:nvPr>
+        </p:nvSpPr>
+        <p:spPr/>
+        <p:txBody>
+          <a:bodyPr/>
+          <a:lstStyle/>
+          <a:p>
+            <a:endParaRPr lang="fr-FR"/>
+          </a:p>
+        </p:txBody>
+      </p:sp>
+      <p:pic>
+        <p:nvPicPr>
+          <p:cNvPr id="5" name="Image 4">
+            <a:extLst>
+              <a:ext uri="{FF2B5EF4-FFF2-40B4-BE49-F238E27FC236}">
+                <a16:creationId xmlns:a16="http://schemas.microsoft.com/office/drawing/2014/main" id="{5EBE3EEC-A083-E0D3-DFB3-5174B7FAA10C}"/>
+              </a:ext>
+            </a:extLst>
+          </p:cNvPr>
+          <p:cNvPicPr>
+            <a:picLocks noChangeAspect="1"/>
+          </p:cNvPicPr>
+          <p:nvPr/>
+        </p:nvPicPr>
+        <p:blipFill>
+          <a:blip r:embed="rId2"/>
+          <a:stretch>
+            <a:fillRect/>
+          </a:stretch>
+        </p:blipFill>
+        <p:spPr>
+          <a:xfrm>
+            <a:off x="827584" y="1197594"/>
+            <a:ext cx="8023041" cy="5111726"/>
+          </a:xfrm>
+          <a:prstGeom prst="rect">
+            <a:avLst/>
+          </a:prstGeom>
+        </p:spPr>
+      </p:pic>
+    </p:spTree>
+    <p:extLst>
+      <p:ext uri="{BB962C8B-B14F-4D97-AF65-F5344CB8AC3E}">
+        <p14:creationId xmlns:p14="http://schemas.microsoft.com/office/powerpoint/2010/main" val="3541083289"/>
       </p:ext>
     </p:extLst>
   </p:cSld>

--- a/ppt/RAG13-FineTuning.pptx
+++ b/ppt/RAG13-FineTuning.pptx
@@ -5,10 +5,10 @@
     <p:sldMasterId id="2147483653" r:id="rId1"/>
   </p:sldMasterIdLst>
   <p:notesMasterIdLst>
-    <p:notesMasterId r:id="rId17"/>
+    <p:notesMasterId r:id="rId26"/>
   </p:notesMasterIdLst>
   <p:handoutMasterIdLst>
-    <p:handoutMasterId r:id="rId18"/>
+    <p:handoutMasterId r:id="rId27"/>
   </p:handoutMasterIdLst>
   <p:sldIdLst>
     <p:sldId id="264" r:id="rId2"/>
@@ -26,6 +26,15 @@
     <p:sldId id="318" r:id="rId14"/>
     <p:sldId id="278" r:id="rId15"/>
     <p:sldId id="279" r:id="rId16"/>
+    <p:sldId id="341" r:id="rId17"/>
+    <p:sldId id="342" r:id="rId18"/>
+    <p:sldId id="344" r:id="rId19"/>
+    <p:sldId id="343" r:id="rId20"/>
+    <p:sldId id="345" r:id="rId21"/>
+    <p:sldId id="348" r:id="rId22"/>
+    <p:sldId id="349" r:id="rId23"/>
+    <p:sldId id="346" r:id="rId24"/>
+    <p:sldId id="347" r:id="rId25"/>
   </p:sldIdLst>
   <p:sldSz cx="9144000" cy="6858000" type="screen4x3"/>
   <p:notesSz cx="6648450" cy="9782175"/>
@@ -4622,6 +4631,626 @@
 </p:sld>
 </file>
 
+<file path=ppt/slides/slide16.xml><?xml version="1.0" encoding="utf-8"?>
+<p:sld xmlns:a="http://schemas.openxmlformats.org/drawingml/2006/main" xmlns:r="http://schemas.openxmlformats.org/officeDocument/2006/relationships" xmlns:p="http://schemas.openxmlformats.org/presentationml/2006/main">
+  <p:cSld>
+    <p:spTree>
+      <p:nvGrpSpPr>
+        <p:cNvPr id="1" name=""/>
+        <p:cNvGrpSpPr/>
+        <p:nvPr/>
+      </p:nvGrpSpPr>
+      <p:grpSpPr>
+        <a:xfrm>
+          <a:off x="0" y="0"/>
+          <a:ext cx="0" cy="0"/>
+          <a:chOff x="0" y="0"/>
+          <a:chExt cx="0" cy="0"/>
+        </a:xfrm>
+      </p:grpSpPr>
+      <p:sp>
+        <p:nvSpPr>
+          <p:cNvPr id="2" name="Titre 1">
+            <a:extLst>
+              <a:ext uri="{FF2B5EF4-FFF2-40B4-BE49-F238E27FC236}">
+                <a16:creationId xmlns:a16="http://schemas.microsoft.com/office/drawing/2014/main" id="{4801FF74-64E2-9BDB-B843-7029D6FBFB3A}"/>
+              </a:ext>
+            </a:extLst>
+          </p:cNvPr>
+          <p:cNvSpPr>
+            <a:spLocks noGrp="1"/>
+          </p:cNvSpPr>
+          <p:nvPr>
+            <p:ph type="title"/>
+          </p:nvPr>
+        </p:nvSpPr>
+        <p:spPr/>
+        <p:txBody>
+          <a:bodyPr/>
+          <a:lstStyle/>
+          <a:p>
+            <a:r>
+              <a:rPr lang="fr-FR" dirty="0" err="1"/>
+              <a:t>DataSet</a:t>
+            </a:r>
+            <a:endParaRPr lang="fr-FR" dirty="0"/>
+          </a:p>
+        </p:txBody>
+      </p:sp>
+      <p:sp>
+        <p:nvSpPr>
+          <p:cNvPr id="3" name="Espace réservé du contenu 2">
+            <a:extLst>
+              <a:ext uri="{FF2B5EF4-FFF2-40B4-BE49-F238E27FC236}">
+                <a16:creationId xmlns:a16="http://schemas.microsoft.com/office/drawing/2014/main" id="{B82644AF-FF79-7A21-BDCF-D230A42DA872}"/>
+              </a:ext>
+            </a:extLst>
+          </p:cNvPr>
+          <p:cNvSpPr>
+            <a:spLocks noGrp="1"/>
+          </p:cNvSpPr>
+          <p:nvPr>
+            <p:ph idx="1"/>
+          </p:nvPr>
+        </p:nvSpPr>
+        <p:spPr/>
+        <p:txBody>
+          <a:bodyPr/>
+          <a:lstStyle/>
+          <a:p>
+            <a:r>
+              <a:rPr lang="fr-FR" dirty="0"/>
+              <a:t>Apprentissage supervisé</a:t>
+            </a:r>
+          </a:p>
+          <a:p>
+            <a:pPr lvl="1"/>
+            <a:r>
+              <a:rPr lang="fr-FR" dirty="0"/>
+              <a:t>Avoir un </a:t>
+            </a:r>
+            <a:r>
+              <a:rPr lang="fr-FR" dirty="0" err="1"/>
+              <a:t>dataset</a:t>
+            </a:r>
+            <a:r>
+              <a:rPr lang="fr-FR" dirty="0"/>
+              <a:t> avec question &amp; réponses attendues</a:t>
+            </a:r>
+          </a:p>
+          <a:p>
+            <a:pPr lvl="1"/>
+            <a:r>
+              <a:rPr lang="fr-FR" dirty="0"/>
+              <a:t>En CSV ou JSON</a:t>
+            </a:r>
+          </a:p>
+          <a:p>
+            <a:pPr lvl="1"/>
+            <a:r>
+              <a:rPr lang="fr-FR" dirty="0"/>
+              <a:t>Plusieurs Mo (idéalement &gt; 100Mo)</a:t>
+            </a:r>
+          </a:p>
+          <a:p>
+            <a:pPr lvl="1"/>
+            <a:r>
+              <a:rPr lang="fr-FR" dirty="0"/>
+              <a:t>Découpage du </a:t>
+            </a:r>
+            <a:r>
+              <a:rPr lang="fr-FR" dirty="0" err="1"/>
+              <a:t>dataset</a:t>
+            </a:r>
+            <a:r>
+              <a:rPr lang="fr-FR" dirty="0"/>
+              <a:t> en 2 parties</a:t>
+            </a:r>
+          </a:p>
+          <a:p>
+            <a:pPr lvl="1"/>
+            <a:r>
+              <a:rPr lang="fr-FR" dirty="0" err="1"/>
+              <a:t>TrainingSet</a:t>
+            </a:r>
+            <a:r>
+              <a:rPr lang="fr-FR" dirty="0"/>
+              <a:t> et </a:t>
+            </a:r>
+            <a:r>
+              <a:rPr lang="fr-FR" dirty="0" err="1"/>
+              <a:t>TestingSet</a:t>
+            </a:r>
+            <a:endParaRPr lang="fr-FR" dirty="0"/>
+          </a:p>
+        </p:txBody>
+      </p:sp>
+    </p:spTree>
+    <p:extLst>
+      <p:ext uri="{BB962C8B-B14F-4D97-AF65-F5344CB8AC3E}">
+        <p14:creationId xmlns:p14="http://schemas.microsoft.com/office/powerpoint/2010/main" val="2775197929"/>
+      </p:ext>
+    </p:extLst>
+  </p:cSld>
+  <p:clrMapOvr>
+    <a:masterClrMapping/>
+  </p:clrMapOvr>
+</p:sld>
+</file>
+
+<file path=ppt/slides/slide17.xml><?xml version="1.0" encoding="utf-8"?>
+<p:sld xmlns:a="http://schemas.openxmlformats.org/drawingml/2006/main" xmlns:r="http://schemas.openxmlformats.org/officeDocument/2006/relationships" xmlns:p="http://schemas.openxmlformats.org/presentationml/2006/main">
+  <p:cSld>
+    <p:spTree>
+      <p:nvGrpSpPr>
+        <p:cNvPr id="1" name=""/>
+        <p:cNvGrpSpPr/>
+        <p:nvPr/>
+      </p:nvGrpSpPr>
+      <p:grpSpPr>
+        <a:xfrm>
+          <a:off x="0" y="0"/>
+          <a:ext cx="0" cy="0"/>
+          <a:chOff x="0" y="0"/>
+          <a:chExt cx="0" cy="0"/>
+        </a:xfrm>
+      </p:grpSpPr>
+      <p:sp>
+        <p:nvSpPr>
+          <p:cNvPr id="2" name="Titre 1">
+            <a:extLst>
+              <a:ext uri="{FF2B5EF4-FFF2-40B4-BE49-F238E27FC236}">
+                <a16:creationId xmlns:a16="http://schemas.microsoft.com/office/drawing/2014/main" id="{7E8F59BE-47C0-5CA5-7E98-F83C65199B6F}"/>
+              </a:ext>
+            </a:extLst>
+          </p:cNvPr>
+          <p:cNvSpPr>
+            <a:spLocks noGrp="1"/>
+          </p:cNvSpPr>
+          <p:nvPr>
+            <p:ph type="title"/>
+          </p:nvPr>
+        </p:nvSpPr>
+        <p:spPr/>
+        <p:txBody>
+          <a:bodyPr/>
+          <a:lstStyle/>
+          <a:p>
+            <a:r>
+              <a:rPr lang="fr-FR" dirty="0"/>
+              <a:t>Tarification</a:t>
+            </a:r>
+          </a:p>
+        </p:txBody>
+      </p:sp>
+      <p:sp>
+        <p:nvSpPr>
+          <p:cNvPr id="3" name="Espace réservé du contenu 2">
+            <a:extLst>
+              <a:ext uri="{FF2B5EF4-FFF2-40B4-BE49-F238E27FC236}">
+                <a16:creationId xmlns:a16="http://schemas.microsoft.com/office/drawing/2014/main" id="{92CEE73E-EEA1-499D-8683-ADA1E6F866FE}"/>
+              </a:ext>
+            </a:extLst>
+          </p:cNvPr>
+          <p:cNvSpPr>
+            <a:spLocks noGrp="1"/>
+          </p:cNvSpPr>
+          <p:nvPr>
+            <p:ph idx="1"/>
+          </p:nvPr>
+        </p:nvSpPr>
+        <p:spPr/>
+        <p:txBody>
+          <a:bodyPr/>
+          <a:lstStyle/>
+          <a:p>
+            <a:r>
+              <a:rPr lang="fr-FR" dirty="0"/>
+              <a:t>GPT 4.1 nano</a:t>
+            </a:r>
+          </a:p>
+          <a:p>
+            <a:pPr lvl="1"/>
+            <a:r>
+              <a:rPr lang="fr-FR" dirty="0"/>
+              <a:t>1.5$ / 1MToken + cout fixe de 4$ par job + 2$ par mois</a:t>
+            </a:r>
+          </a:p>
+          <a:p>
+            <a:r>
+              <a:rPr lang="fr-FR" dirty="0"/>
+              <a:t>GPT 4.1</a:t>
+            </a:r>
+          </a:p>
+          <a:p>
+            <a:pPr lvl="1"/>
+            <a:r>
+              <a:rPr lang="fr-FR" dirty="0"/>
+              <a:t>25$ / 1MToken</a:t>
+            </a:r>
+          </a:p>
+          <a:p>
+            <a:r>
+              <a:rPr lang="fr-FR" dirty="0"/>
+              <a:t>GPT 5</a:t>
+            </a:r>
+          </a:p>
+          <a:p>
+            <a:pPr lvl="1"/>
+            <a:r>
+              <a:rPr lang="fr-FR" dirty="0"/>
+              <a:t>10K$ / 1MToken</a:t>
+            </a:r>
+          </a:p>
+          <a:p>
+            <a:r>
+              <a:rPr lang="fr-FR" dirty="0"/>
+              <a:t>Pour 1 </a:t>
+            </a:r>
+            <a:r>
+              <a:rPr lang="fr-FR" dirty="0" err="1"/>
+              <a:t>dataset</a:t>
+            </a:r>
+            <a:r>
+              <a:rPr lang="fr-FR" dirty="0"/>
+              <a:t> de 100Mo</a:t>
+            </a:r>
+          </a:p>
+          <a:p>
+            <a:pPr lvl="1"/>
+            <a:r>
+              <a:rPr lang="fr-FR" dirty="0"/>
+              <a:t>50MToken</a:t>
+            </a:r>
+          </a:p>
+          <a:p>
+            <a:pPr lvl="1"/>
+            <a:r>
+              <a:rPr lang="fr-FR" dirty="0"/>
+              <a:t>2 </a:t>
+            </a:r>
+            <a:r>
+              <a:rPr lang="fr-FR" dirty="0" err="1"/>
+              <a:t>epochs</a:t>
+            </a:r>
+            <a:r>
+              <a:rPr lang="fr-FR" dirty="0"/>
+              <a:t> minimum</a:t>
+            </a:r>
+          </a:p>
+          <a:p>
+            <a:pPr lvl="1"/>
+            <a:r>
+              <a:rPr lang="fr-FR"/>
+              <a:t>De 80$ </a:t>
+            </a:r>
+            <a:r>
+              <a:rPr lang="fr-FR" dirty="0"/>
+              <a:t>à 10K$</a:t>
+            </a:r>
+          </a:p>
+        </p:txBody>
+      </p:sp>
+    </p:spTree>
+    <p:extLst>
+      <p:ext uri="{BB962C8B-B14F-4D97-AF65-F5344CB8AC3E}">
+        <p14:creationId xmlns:p14="http://schemas.microsoft.com/office/powerpoint/2010/main" val="3279174304"/>
+      </p:ext>
+    </p:extLst>
+  </p:cSld>
+  <p:clrMapOvr>
+    <a:masterClrMapping/>
+  </p:clrMapOvr>
+</p:sld>
+</file>
+
+<file path=ppt/slides/slide18.xml><?xml version="1.0" encoding="utf-8"?>
+<p:sld xmlns:a="http://schemas.openxmlformats.org/drawingml/2006/main" xmlns:r="http://schemas.openxmlformats.org/officeDocument/2006/relationships" xmlns:p="http://schemas.openxmlformats.org/presentationml/2006/main">
+  <p:cSld>
+    <p:spTree>
+      <p:nvGrpSpPr>
+        <p:cNvPr id="1" name=""/>
+        <p:cNvGrpSpPr/>
+        <p:nvPr/>
+      </p:nvGrpSpPr>
+      <p:grpSpPr>
+        <a:xfrm>
+          <a:off x="0" y="0"/>
+          <a:ext cx="0" cy="0"/>
+          <a:chOff x="0" y="0"/>
+          <a:chExt cx="0" cy="0"/>
+        </a:xfrm>
+      </p:grpSpPr>
+      <p:sp>
+        <p:nvSpPr>
+          <p:cNvPr id="2" name="Titre 1">
+            <a:extLst>
+              <a:ext uri="{FF2B5EF4-FFF2-40B4-BE49-F238E27FC236}">
+                <a16:creationId xmlns:a16="http://schemas.microsoft.com/office/drawing/2014/main" id="{2674BD0A-B3C8-247F-4898-1AECAD260132}"/>
+              </a:ext>
+            </a:extLst>
+          </p:cNvPr>
+          <p:cNvSpPr>
+            <a:spLocks noGrp="1"/>
+          </p:cNvSpPr>
+          <p:nvPr>
+            <p:ph type="title"/>
+          </p:nvPr>
+        </p:nvSpPr>
+        <p:spPr/>
+        <p:txBody>
+          <a:bodyPr/>
+          <a:lstStyle/>
+          <a:p>
+            <a:r>
+              <a:rPr lang="fr-FR" dirty="0"/>
+              <a:t>Optimisation</a:t>
+            </a:r>
+          </a:p>
+        </p:txBody>
+      </p:sp>
+      <p:sp>
+        <p:nvSpPr>
+          <p:cNvPr id="3" name="Espace réservé du contenu 2">
+            <a:extLst>
+              <a:ext uri="{FF2B5EF4-FFF2-40B4-BE49-F238E27FC236}">
+                <a16:creationId xmlns:a16="http://schemas.microsoft.com/office/drawing/2014/main" id="{7EEAA434-2501-9ACF-347A-DBB34891A72A}"/>
+              </a:ext>
+            </a:extLst>
+          </p:cNvPr>
+          <p:cNvSpPr>
+            <a:spLocks noGrp="1"/>
+          </p:cNvSpPr>
+          <p:nvPr>
+            <p:ph idx="1"/>
+          </p:nvPr>
+        </p:nvSpPr>
+        <p:spPr/>
+        <p:txBody>
+          <a:bodyPr/>
+          <a:lstStyle/>
+          <a:p>
+            <a:r>
+              <a:rPr lang="fr-FR" dirty="0" err="1"/>
+              <a:t>Epochs</a:t>
+            </a:r>
+            <a:endParaRPr lang="fr-FR" dirty="0"/>
+          </a:p>
+          <a:p>
+            <a:pPr lvl="1"/>
+            <a:r>
+              <a:rPr lang="fr-FR" dirty="0"/>
+              <a:t>Nombre d'itération sur le </a:t>
+            </a:r>
+            <a:r>
+              <a:rPr lang="fr-FR" dirty="0" err="1"/>
+              <a:t>dataset</a:t>
+            </a:r>
+            <a:endParaRPr lang="fr-FR" dirty="0"/>
+          </a:p>
+          <a:p>
+            <a:pPr lvl="1"/>
+            <a:r>
+              <a:rPr lang="fr-FR" dirty="0"/>
+              <a:t>2 minimum</a:t>
+            </a:r>
+          </a:p>
+          <a:p>
+            <a:r>
+              <a:rPr lang="fr-FR" dirty="0" err="1"/>
+              <a:t>Trainable</a:t>
+            </a:r>
+            <a:endParaRPr lang="fr-FR" dirty="0"/>
+          </a:p>
+          <a:p>
+            <a:pPr lvl="1"/>
+            <a:r>
+              <a:rPr lang="fr-FR" dirty="0"/>
+              <a:t>Possibilité de geler les </a:t>
+            </a:r>
+            <a:r>
+              <a:rPr lang="fr-FR" dirty="0" err="1"/>
+              <a:t>layers</a:t>
+            </a:r>
+            <a:r>
+              <a:rPr lang="fr-FR" dirty="0"/>
+              <a:t> proches des inputs</a:t>
+            </a:r>
+          </a:p>
+          <a:p>
+            <a:r>
+              <a:rPr lang="fr-FR" dirty="0"/>
+              <a:t>Petit modèle</a:t>
+            </a:r>
+          </a:p>
+          <a:p>
+            <a:pPr lvl="1"/>
+            <a:r>
+              <a:rPr lang="fr-FR" dirty="0"/>
+              <a:t>Paradoxalement un petit modèle marchera mieux qu'un grand</a:t>
+            </a:r>
+          </a:p>
+          <a:p>
+            <a:pPr lvl="1"/>
+            <a:r>
+              <a:rPr lang="fr-FR" dirty="0"/>
+              <a:t>Car convergera plus vite</a:t>
+            </a:r>
+          </a:p>
+          <a:p>
+            <a:pPr lvl="1"/>
+            <a:endParaRPr lang="fr-FR" dirty="0"/>
+          </a:p>
+        </p:txBody>
+      </p:sp>
+    </p:spTree>
+    <p:extLst>
+      <p:ext uri="{BB962C8B-B14F-4D97-AF65-F5344CB8AC3E}">
+        <p14:creationId xmlns:p14="http://schemas.microsoft.com/office/powerpoint/2010/main" val="1842476340"/>
+      </p:ext>
+    </p:extLst>
+  </p:cSld>
+  <p:clrMapOvr>
+    <a:masterClrMapping/>
+  </p:clrMapOvr>
+</p:sld>
+</file>
+
+<file path=ppt/slides/slide19.xml><?xml version="1.0" encoding="utf-8"?>
+<p:sld xmlns:a="http://schemas.openxmlformats.org/drawingml/2006/main" xmlns:r="http://schemas.openxmlformats.org/officeDocument/2006/relationships" xmlns:p="http://schemas.openxmlformats.org/presentationml/2006/main">
+  <p:cSld>
+    <p:spTree>
+      <p:nvGrpSpPr>
+        <p:cNvPr id="1" name=""/>
+        <p:cNvGrpSpPr/>
+        <p:nvPr/>
+      </p:nvGrpSpPr>
+      <p:grpSpPr>
+        <a:xfrm>
+          <a:off x="0" y="0"/>
+          <a:ext cx="0" cy="0"/>
+          <a:chOff x="0" y="0"/>
+          <a:chExt cx="0" cy="0"/>
+        </a:xfrm>
+      </p:grpSpPr>
+      <p:sp>
+        <p:nvSpPr>
+          <p:cNvPr id="2" name="Titre 1">
+            <a:extLst>
+              <a:ext uri="{FF2B5EF4-FFF2-40B4-BE49-F238E27FC236}">
+                <a16:creationId xmlns:a16="http://schemas.microsoft.com/office/drawing/2014/main" id="{1A1E81D1-E936-2C8D-D5CA-2B2682789F53}"/>
+              </a:ext>
+            </a:extLst>
+          </p:cNvPr>
+          <p:cNvSpPr>
+            <a:spLocks noGrp="1"/>
+          </p:cNvSpPr>
+          <p:nvPr>
+            <p:ph type="title"/>
+          </p:nvPr>
+        </p:nvSpPr>
+        <p:spPr/>
+        <p:txBody>
+          <a:bodyPr/>
+          <a:lstStyle/>
+          <a:p>
+            <a:r>
+              <a:rPr lang="fr-FR" dirty="0"/>
+              <a:t>LLM SaaS</a:t>
+            </a:r>
+          </a:p>
+        </p:txBody>
+      </p:sp>
+      <p:sp>
+        <p:nvSpPr>
+          <p:cNvPr id="3" name="Espace réservé du contenu 2">
+            <a:extLst>
+              <a:ext uri="{FF2B5EF4-FFF2-40B4-BE49-F238E27FC236}">
+                <a16:creationId xmlns:a16="http://schemas.microsoft.com/office/drawing/2014/main" id="{5DD711A3-ACFC-5D18-64E6-849A6F60230E}"/>
+              </a:ext>
+            </a:extLst>
+          </p:cNvPr>
+          <p:cNvSpPr>
+            <a:spLocks noGrp="1"/>
+          </p:cNvSpPr>
+          <p:nvPr>
+            <p:ph idx="1"/>
+          </p:nvPr>
+        </p:nvSpPr>
+        <p:spPr/>
+        <p:txBody>
+          <a:bodyPr/>
+          <a:lstStyle/>
+          <a:p>
+            <a:r>
+              <a:rPr lang="fr-FR" dirty="0"/>
+              <a:t>Pour un LLM SaaS de type </a:t>
+            </a:r>
+            <a:r>
+              <a:rPr lang="fr-FR" dirty="0" err="1"/>
+              <a:t>OpenAI</a:t>
+            </a:r>
+            <a:r>
+              <a:rPr lang="fr-FR" dirty="0"/>
+              <a:t> ou Mistral.ai</a:t>
+            </a:r>
+          </a:p>
+          <a:p>
+            <a:pPr lvl="1"/>
+            <a:r>
+              <a:rPr lang="fr-FR" dirty="0"/>
+              <a:t>Utiliser les outils ou API du fournisseur</a:t>
+            </a:r>
+          </a:p>
+          <a:p>
+            <a:pPr lvl="1"/>
+            <a:r>
+              <a:rPr lang="fr-FR" dirty="0"/>
+              <a:t>API </a:t>
+            </a:r>
+            <a:r>
+              <a:rPr lang="fr-FR" dirty="0" err="1"/>
+              <a:t>HuggingFace</a:t>
+            </a:r>
+            <a:r>
+              <a:rPr lang="fr-FR" dirty="0"/>
+              <a:t> également</a:t>
+            </a:r>
+          </a:p>
+          <a:p>
+            <a:pPr lvl="1"/>
+            <a:r>
+              <a:rPr lang="fr-FR" dirty="0"/>
+              <a:t>Voir exemple Mistral</a:t>
+            </a:r>
+          </a:p>
+          <a:p>
+            <a:r>
+              <a:rPr lang="fr-FR" dirty="0"/>
+              <a:t>Pour un LLM on promise</a:t>
+            </a:r>
+          </a:p>
+          <a:p>
+            <a:pPr lvl="1"/>
+            <a:r>
+              <a:rPr lang="fr-FR" dirty="0"/>
+              <a:t>Utilisation possible de </a:t>
+            </a:r>
+            <a:r>
+              <a:rPr lang="fr-FR" dirty="0" err="1"/>
+              <a:t>langchain</a:t>
+            </a:r>
+            <a:endParaRPr lang="fr-FR" dirty="0"/>
+          </a:p>
+          <a:p>
+            <a:pPr lvl="1"/>
+            <a:r>
+              <a:rPr lang="fr-FR" dirty="0"/>
+              <a:t>Nécessite un GPU</a:t>
+            </a:r>
+          </a:p>
+          <a:p>
+            <a:pPr lvl="1"/>
+            <a:r>
+              <a:rPr lang="fr-FR" dirty="0"/>
+              <a:t>En fonction du modèle de 1h à 1 semaine de calcul</a:t>
+            </a:r>
+          </a:p>
+        </p:txBody>
+      </p:sp>
+    </p:spTree>
+    <p:extLst>
+      <p:ext uri="{BB962C8B-B14F-4D97-AF65-F5344CB8AC3E}">
+        <p14:creationId xmlns:p14="http://schemas.microsoft.com/office/powerpoint/2010/main" val="3752228764"/>
+      </p:ext>
+    </p:extLst>
+  </p:cSld>
+  <p:clrMapOvr>
+    <a:masterClrMapping/>
+  </p:clrMapOvr>
+</p:sld>
+</file>
+
 <file path=ppt/slides/slide2.xml><?xml version="1.0" encoding="utf-8"?>
 <p:sld xmlns:a="http://schemas.openxmlformats.org/drawingml/2006/main" xmlns:r="http://schemas.openxmlformats.org/officeDocument/2006/relationships" xmlns:p="http://schemas.openxmlformats.org/presentationml/2006/main">
   <p:cSld>
@@ -4721,6 +5350,670 @@
     <p:extLst>
       <p:ext uri="{BB962C8B-B14F-4D97-AF65-F5344CB8AC3E}">
         <p14:creationId xmlns:p14="http://schemas.microsoft.com/office/powerpoint/2010/main" val="1167108909"/>
+      </p:ext>
+    </p:extLst>
+  </p:cSld>
+  <p:clrMapOvr>
+    <a:masterClrMapping/>
+  </p:clrMapOvr>
+</p:sld>
+</file>
+
+<file path=ppt/slides/slide20.xml><?xml version="1.0" encoding="utf-8"?>
+<p:sld xmlns:a="http://schemas.openxmlformats.org/drawingml/2006/main" xmlns:r="http://schemas.openxmlformats.org/officeDocument/2006/relationships" xmlns:p="http://schemas.openxmlformats.org/presentationml/2006/main">
+  <p:cSld>
+    <p:spTree>
+      <p:nvGrpSpPr>
+        <p:cNvPr id="1" name=""/>
+        <p:cNvGrpSpPr/>
+        <p:nvPr/>
+      </p:nvGrpSpPr>
+      <p:grpSpPr>
+        <a:xfrm>
+          <a:off x="0" y="0"/>
+          <a:ext cx="0" cy="0"/>
+          <a:chOff x="0" y="0"/>
+          <a:chExt cx="0" cy="0"/>
+        </a:xfrm>
+      </p:grpSpPr>
+      <p:sp>
+        <p:nvSpPr>
+          <p:cNvPr id="2" name="Titre 1">
+            <a:extLst>
+              <a:ext uri="{FF2B5EF4-FFF2-40B4-BE49-F238E27FC236}">
+                <a16:creationId xmlns:a16="http://schemas.microsoft.com/office/drawing/2014/main" id="{A36C85D3-863D-FD50-E988-C26AD2534E13}"/>
+              </a:ext>
+            </a:extLst>
+          </p:cNvPr>
+          <p:cNvSpPr>
+            <a:spLocks noGrp="1"/>
+          </p:cNvSpPr>
+          <p:nvPr>
+            <p:ph type="title"/>
+          </p:nvPr>
+        </p:nvSpPr>
+        <p:spPr/>
+        <p:txBody>
+          <a:bodyPr/>
+          <a:lstStyle/>
+          <a:p>
+            <a:r>
+              <a:rPr lang="fr-FR" dirty="0" err="1"/>
+              <a:t>LoRA</a:t>
+            </a:r>
+            <a:endParaRPr lang="fr-FR" dirty="0"/>
+          </a:p>
+        </p:txBody>
+      </p:sp>
+      <p:sp>
+        <p:nvSpPr>
+          <p:cNvPr id="3" name="Espace réservé du contenu 2">
+            <a:extLst>
+              <a:ext uri="{FF2B5EF4-FFF2-40B4-BE49-F238E27FC236}">
+                <a16:creationId xmlns:a16="http://schemas.microsoft.com/office/drawing/2014/main" id="{D3B91305-7970-9067-1317-69F4549F533A}"/>
+              </a:ext>
+            </a:extLst>
+          </p:cNvPr>
+          <p:cNvSpPr>
+            <a:spLocks noGrp="1"/>
+          </p:cNvSpPr>
+          <p:nvPr>
+            <p:ph idx="1"/>
+          </p:nvPr>
+        </p:nvSpPr>
+        <p:spPr>
+          <a:xfrm>
+            <a:off x="179513" y="1412776"/>
+            <a:ext cx="5479416" cy="5040560"/>
+          </a:xfrm>
+        </p:spPr>
+        <p:txBody>
+          <a:bodyPr/>
+          <a:lstStyle/>
+          <a:p>
+            <a:r>
+              <a:rPr lang="fr-FR" dirty="0"/>
+              <a:t>Low Rank Adaptation</a:t>
+            </a:r>
+          </a:p>
+          <a:p>
+            <a:r>
+              <a:rPr lang="fr-FR" sz="2000" dirty="0" err="1"/>
+              <a:t>LoRA</a:t>
+            </a:r>
+            <a:r>
+              <a:rPr lang="fr-FR" sz="2000" dirty="0"/>
+              <a:t> est une méthode d'apprentissage conçue pour accélérer l'apprentissage de grands modèles de langage, tout en réduisant la consommation de mémoire</a:t>
+            </a:r>
+          </a:p>
+          <a:p>
+            <a:r>
+              <a:rPr lang="fr-FR" sz="2000" dirty="0"/>
+              <a:t>En introduisant des paires de matrices de pondération par décomposition en rangs, appelées matrices de mise à jour, aux pondérations existantes, </a:t>
+            </a:r>
+            <a:r>
+              <a:rPr lang="fr-FR" sz="2000" dirty="0" err="1"/>
+              <a:t>LoRA</a:t>
+            </a:r>
+            <a:r>
+              <a:rPr lang="fr-FR" sz="2000" dirty="0"/>
+              <a:t> se concentre uniquement sur l'apprentissage de ces nouvelles pondérations</a:t>
+            </a:r>
+          </a:p>
+          <a:p>
+            <a:r>
+              <a:rPr lang="fr-FR" sz="2000" dirty="0"/>
+              <a:t>GPU de 48Go obligatoire</a:t>
+            </a:r>
+          </a:p>
+          <a:p>
+            <a:endParaRPr lang="fr-FR" dirty="0"/>
+          </a:p>
+        </p:txBody>
+      </p:sp>
+      <p:pic>
+        <p:nvPicPr>
+          <p:cNvPr id="4" name="Image 3">
+            <a:extLst>
+              <a:ext uri="{FF2B5EF4-FFF2-40B4-BE49-F238E27FC236}">
+                <a16:creationId xmlns:a16="http://schemas.microsoft.com/office/drawing/2014/main" id="{8412B7C8-C985-BCFA-4C5C-60844D5841B9}"/>
+              </a:ext>
+            </a:extLst>
+          </p:cNvPr>
+          <p:cNvPicPr>
+            <a:picLocks noChangeAspect="1"/>
+          </p:cNvPicPr>
+          <p:nvPr/>
+        </p:nvPicPr>
+        <p:blipFill>
+          <a:blip r:embed="rId2"/>
+          <a:stretch>
+            <a:fillRect/>
+          </a:stretch>
+        </p:blipFill>
+        <p:spPr>
+          <a:xfrm>
+            <a:off x="5658928" y="1844824"/>
+            <a:ext cx="3386364" cy="3717032"/>
+          </a:xfrm>
+          <a:prstGeom prst="rect">
+            <a:avLst/>
+          </a:prstGeom>
+        </p:spPr>
+      </p:pic>
+    </p:spTree>
+    <p:extLst>
+      <p:ext uri="{BB962C8B-B14F-4D97-AF65-F5344CB8AC3E}">
+        <p14:creationId xmlns:p14="http://schemas.microsoft.com/office/powerpoint/2010/main" val="205216239"/>
+      </p:ext>
+    </p:extLst>
+  </p:cSld>
+  <p:clrMapOvr>
+    <a:masterClrMapping/>
+  </p:clrMapOvr>
+</p:sld>
+</file>
+
+<file path=ppt/slides/slide21.xml><?xml version="1.0" encoding="utf-8"?>
+<p:sld xmlns:a="http://schemas.openxmlformats.org/drawingml/2006/main" xmlns:r="http://schemas.openxmlformats.org/officeDocument/2006/relationships" xmlns:p="http://schemas.openxmlformats.org/presentationml/2006/main">
+  <p:cSld>
+    <p:spTree>
+      <p:nvGrpSpPr>
+        <p:cNvPr id="1" name=""/>
+        <p:cNvGrpSpPr/>
+        <p:nvPr/>
+      </p:nvGrpSpPr>
+      <p:grpSpPr>
+        <a:xfrm>
+          <a:off x="0" y="0"/>
+          <a:ext cx="0" cy="0"/>
+          <a:chOff x="0" y="0"/>
+          <a:chExt cx="0" cy="0"/>
+        </a:xfrm>
+      </p:grpSpPr>
+      <p:sp>
+        <p:nvSpPr>
+          <p:cNvPr id="2" name="Titre 1">
+            <a:extLst>
+              <a:ext uri="{FF2B5EF4-FFF2-40B4-BE49-F238E27FC236}">
+                <a16:creationId xmlns:a16="http://schemas.microsoft.com/office/drawing/2014/main" id="{085AB4CD-50F7-E19D-2942-27F347D58E63}"/>
+              </a:ext>
+            </a:extLst>
+          </p:cNvPr>
+          <p:cNvSpPr>
+            <a:spLocks noGrp="1"/>
+          </p:cNvSpPr>
+          <p:nvPr>
+            <p:ph type="title"/>
+          </p:nvPr>
+        </p:nvSpPr>
+        <p:spPr/>
+        <p:txBody>
+          <a:bodyPr/>
+          <a:lstStyle/>
+          <a:p>
+            <a:r>
+              <a:rPr lang="fr-FR" dirty="0" err="1"/>
+              <a:t>LoRA</a:t>
+            </a:r>
+            <a:endParaRPr lang="fr-FR" dirty="0"/>
+          </a:p>
+        </p:txBody>
+      </p:sp>
+      <p:sp>
+        <p:nvSpPr>
+          <p:cNvPr id="3" name="Espace réservé du contenu 2">
+            <a:extLst>
+              <a:ext uri="{FF2B5EF4-FFF2-40B4-BE49-F238E27FC236}">
+                <a16:creationId xmlns:a16="http://schemas.microsoft.com/office/drawing/2014/main" id="{2F649A8B-5BF8-435D-BB8D-15EC190D081F}"/>
+              </a:ext>
+            </a:extLst>
+          </p:cNvPr>
+          <p:cNvSpPr>
+            <a:spLocks noGrp="1"/>
+          </p:cNvSpPr>
+          <p:nvPr>
+            <p:ph idx="1"/>
+          </p:nvPr>
+        </p:nvSpPr>
+        <p:spPr/>
+        <p:txBody>
+          <a:bodyPr/>
+          <a:lstStyle/>
+          <a:p>
+            <a:endParaRPr lang="fr-FR"/>
+          </a:p>
+        </p:txBody>
+      </p:sp>
+      <p:pic>
+        <p:nvPicPr>
+          <p:cNvPr id="5" name="Image 4">
+            <a:extLst>
+              <a:ext uri="{FF2B5EF4-FFF2-40B4-BE49-F238E27FC236}">
+                <a16:creationId xmlns:a16="http://schemas.microsoft.com/office/drawing/2014/main" id="{591D2084-09CA-F63C-27D6-F0AC94078800}"/>
+              </a:ext>
+            </a:extLst>
+          </p:cNvPr>
+          <p:cNvPicPr>
+            <a:picLocks noChangeAspect="1"/>
+          </p:cNvPicPr>
+          <p:nvPr/>
+        </p:nvPicPr>
+        <p:blipFill>
+          <a:blip r:embed="rId2"/>
+          <a:stretch>
+            <a:fillRect/>
+          </a:stretch>
+        </p:blipFill>
+        <p:spPr>
+          <a:xfrm>
+            <a:off x="1554683" y="1156209"/>
+            <a:ext cx="6401693" cy="5287113"/>
+          </a:xfrm>
+          <a:prstGeom prst="rect">
+            <a:avLst/>
+          </a:prstGeom>
+        </p:spPr>
+      </p:pic>
+    </p:spTree>
+    <p:extLst>
+      <p:ext uri="{BB962C8B-B14F-4D97-AF65-F5344CB8AC3E}">
+        <p14:creationId xmlns:p14="http://schemas.microsoft.com/office/powerpoint/2010/main" val="1510836556"/>
+      </p:ext>
+    </p:extLst>
+  </p:cSld>
+  <p:clrMapOvr>
+    <a:masterClrMapping/>
+  </p:clrMapOvr>
+</p:sld>
+</file>
+
+<file path=ppt/slides/slide22.xml><?xml version="1.0" encoding="utf-8"?>
+<p:sld xmlns:a="http://schemas.openxmlformats.org/drawingml/2006/main" xmlns:r="http://schemas.openxmlformats.org/officeDocument/2006/relationships" xmlns:p="http://schemas.openxmlformats.org/presentationml/2006/main">
+  <p:cSld>
+    <p:spTree>
+      <p:nvGrpSpPr>
+        <p:cNvPr id="1" name=""/>
+        <p:cNvGrpSpPr/>
+        <p:nvPr/>
+      </p:nvGrpSpPr>
+      <p:grpSpPr>
+        <a:xfrm>
+          <a:off x="0" y="0"/>
+          <a:ext cx="0" cy="0"/>
+          <a:chOff x="0" y="0"/>
+          <a:chExt cx="0" cy="0"/>
+        </a:xfrm>
+      </p:grpSpPr>
+      <p:sp>
+        <p:nvSpPr>
+          <p:cNvPr id="2" name="Titre 1">
+            <a:extLst>
+              <a:ext uri="{FF2B5EF4-FFF2-40B4-BE49-F238E27FC236}">
+                <a16:creationId xmlns:a16="http://schemas.microsoft.com/office/drawing/2014/main" id="{80BD19AE-78B6-6A52-810D-37098401EF85}"/>
+              </a:ext>
+            </a:extLst>
+          </p:cNvPr>
+          <p:cNvSpPr>
+            <a:spLocks noGrp="1"/>
+          </p:cNvSpPr>
+          <p:nvPr>
+            <p:ph type="title"/>
+          </p:nvPr>
+        </p:nvSpPr>
+        <p:spPr/>
+        <p:txBody>
+          <a:bodyPr/>
+          <a:lstStyle/>
+          <a:p>
+            <a:endParaRPr lang="fr-FR"/>
+          </a:p>
+        </p:txBody>
+      </p:sp>
+      <p:sp>
+        <p:nvSpPr>
+          <p:cNvPr id="3" name="Espace réservé du contenu 2">
+            <a:extLst>
+              <a:ext uri="{FF2B5EF4-FFF2-40B4-BE49-F238E27FC236}">
+                <a16:creationId xmlns:a16="http://schemas.microsoft.com/office/drawing/2014/main" id="{3BEAAC46-AEF0-53BE-FBF3-C9C31FD31061}"/>
+              </a:ext>
+            </a:extLst>
+          </p:cNvPr>
+          <p:cNvSpPr>
+            <a:spLocks noGrp="1"/>
+          </p:cNvSpPr>
+          <p:nvPr>
+            <p:ph idx="1"/>
+          </p:nvPr>
+        </p:nvSpPr>
+        <p:spPr/>
+        <p:txBody>
+          <a:bodyPr/>
+          <a:lstStyle/>
+          <a:p>
+            <a:endParaRPr lang="fr-FR"/>
+          </a:p>
+        </p:txBody>
+      </p:sp>
+      <p:pic>
+        <p:nvPicPr>
+          <p:cNvPr id="1026" name="Picture 2" descr="Full-model Fine-tuning vs. LoRA vs. RAG | by Somanath diksangi | Oct, 2025  | Medium">
+            <a:extLst>
+              <a:ext uri="{FF2B5EF4-FFF2-40B4-BE49-F238E27FC236}">
+                <a16:creationId xmlns:a16="http://schemas.microsoft.com/office/drawing/2014/main" id="{DB16A888-694E-77E8-3547-2A77A979870B}"/>
+              </a:ext>
+            </a:extLst>
+          </p:cNvPr>
+          <p:cNvPicPr>
+            <a:picLocks noChangeAspect="1" noChangeArrowheads="1"/>
+          </p:cNvPicPr>
+          <p:nvPr/>
+        </p:nvPicPr>
+        <p:blipFill>
+          <a:blip r:embed="rId2">
+            <a:extLst>
+              <a:ext uri="{28A0092B-C50C-407E-A947-70E740481C1C}">
+                <a14:useLocalDpi xmlns:a14="http://schemas.microsoft.com/office/drawing/2010/main" val="0"/>
+              </a:ext>
+            </a:extLst>
+          </a:blip>
+          <a:srcRect/>
+          <a:stretch>
+            <a:fillRect/>
+          </a:stretch>
+        </p:blipFill>
+        <p:spPr bwMode="auto">
+          <a:xfrm>
+            <a:off x="1763713" y="0"/>
+            <a:ext cx="5616575" cy="6858000"/>
+          </a:xfrm>
+          <a:prstGeom prst="rect">
+            <a:avLst/>
+          </a:prstGeom>
+          <a:noFill/>
+          <a:extLst>
+            <a:ext uri="{909E8E84-426E-40DD-AFC4-6F175D3DCCD1}">
+              <a14:hiddenFill xmlns:a14="http://schemas.microsoft.com/office/drawing/2010/main">
+                <a:solidFill>
+                  <a:srgbClr val="FFFFFF"/>
+                </a:solidFill>
+              </a14:hiddenFill>
+            </a:ext>
+          </a:extLst>
+        </p:spPr>
+      </p:pic>
+    </p:spTree>
+    <p:extLst>
+      <p:ext uri="{BB962C8B-B14F-4D97-AF65-F5344CB8AC3E}">
+        <p14:creationId xmlns:p14="http://schemas.microsoft.com/office/powerpoint/2010/main" val="3398122075"/>
+      </p:ext>
+    </p:extLst>
+  </p:cSld>
+  <p:clrMapOvr>
+    <a:masterClrMapping/>
+  </p:clrMapOvr>
+</p:sld>
+</file>
+
+<file path=ppt/slides/slide23.xml><?xml version="1.0" encoding="utf-8"?>
+<p:sld xmlns:a="http://schemas.openxmlformats.org/drawingml/2006/main" xmlns:r="http://schemas.openxmlformats.org/officeDocument/2006/relationships" xmlns:p="http://schemas.openxmlformats.org/presentationml/2006/main">
+  <p:cSld>
+    <p:spTree>
+      <p:nvGrpSpPr>
+        <p:cNvPr id="1" name=""/>
+        <p:cNvGrpSpPr/>
+        <p:nvPr/>
+      </p:nvGrpSpPr>
+      <p:grpSpPr>
+        <a:xfrm>
+          <a:off x="0" y="0"/>
+          <a:ext cx="0" cy="0"/>
+          <a:chOff x="0" y="0"/>
+          <a:chExt cx="0" cy="0"/>
+        </a:xfrm>
+      </p:grpSpPr>
+      <p:sp>
+        <p:nvSpPr>
+          <p:cNvPr id="2" name="Titre 1">
+            <a:extLst>
+              <a:ext uri="{FF2B5EF4-FFF2-40B4-BE49-F238E27FC236}">
+                <a16:creationId xmlns:a16="http://schemas.microsoft.com/office/drawing/2014/main" id="{F118909D-F04D-6E31-5C67-54F753EC11D2}"/>
+              </a:ext>
+            </a:extLst>
+          </p:cNvPr>
+          <p:cNvSpPr>
+            <a:spLocks noGrp="1"/>
+          </p:cNvSpPr>
+          <p:nvPr>
+            <p:ph type="title"/>
+          </p:nvPr>
+        </p:nvSpPr>
+        <p:spPr/>
+        <p:txBody>
+          <a:bodyPr/>
+          <a:lstStyle/>
+          <a:p>
+            <a:r>
+              <a:rPr lang="fr-FR" dirty="0" err="1"/>
+              <a:t>LoRA</a:t>
+            </a:r>
+            <a:endParaRPr lang="fr-FR" dirty="0"/>
+          </a:p>
+        </p:txBody>
+      </p:sp>
+      <p:sp>
+        <p:nvSpPr>
+          <p:cNvPr id="3" name="Espace réservé du contenu 2">
+            <a:extLst>
+              <a:ext uri="{FF2B5EF4-FFF2-40B4-BE49-F238E27FC236}">
+                <a16:creationId xmlns:a16="http://schemas.microsoft.com/office/drawing/2014/main" id="{91E8B70C-3BAC-7C3B-F538-C6F5B6281541}"/>
+              </a:ext>
+            </a:extLst>
+          </p:cNvPr>
+          <p:cNvSpPr>
+            <a:spLocks noGrp="1"/>
+          </p:cNvSpPr>
+          <p:nvPr>
+            <p:ph idx="1"/>
+          </p:nvPr>
+        </p:nvSpPr>
+        <p:spPr/>
+        <p:txBody>
+          <a:bodyPr/>
+          <a:lstStyle/>
+          <a:p>
+            <a:r>
+              <a:rPr lang="fr-FR" dirty="0"/>
+              <a:t>Paramètres </a:t>
+            </a:r>
+            <a:r>
+              <a:rPr lang="fr-FR" dirty="0" err="1"/>
+              <a:t>LoRA</a:t>
+            </a:r>
+            <a:endParaRPr lang="fr-FR" dirty="0"/>
+          </a:p>
+          <a:p>
+            <a:r>
+              <a:rPr lang="fr-FR" dirty="0"/>
+              <a:t>Rank</a:t>
+            </a:r>
+          </a:p>
+          <a:p>
+            <a:pPr lvl="1"/>
+            <a:r>
+              <a:rPr lang="fr-FR" dirty="0"/>
+              <a:t>Nombre de matrice de décomposition</a:t>
+            </a:r>
+          </a:p>
+          <a:p>
+            <a:pPr lvl="1"/>
+            <a:r>
+              <a:rPr lang="fr-FR" dirty="0" err="1"/>
+              <a:t>rank</a:t>
+            </a:r>
+            <a:r>
+              <a:rPr lang="fr-FR" dirty="0"/>
+              <a:t>=8 conseillé</a:t>
+            </a:r>
+          </a:p>
+          <a:p>
+            <a:r>
+              <a:rPr lang="fr-FR" dirty="0"/>
+              <a:t>Alpha</a:t>
+            </a:r>
+          </a:p>
+          <a:p>
+            <a:pPr lvl="1"/>
+            <a:r>
+              <a:rPr lang="fr-FR" dirty="0"/>
+              <a:t>Facteur d'échelle</a:t>
+            </a:r>
+          </a:p>
+          <a:p>
+            <a:pPr lvl="1"/>
+            <a:r>
+              <a:rPr lang="fr-FR" dirty="0"/>
+              <a:t>Pondération de la matrice de décomposition par rapport au LLM</a:t>
+            </a:r>
+          </a:p>
+          <a:p>
+            <a:pPr lvl="1"/>
+            <a:r>
+              <a:rPr lang="fr-FR" dirty="0"/>
+              <a:t>Alpha fort = adaptation importante par rapport au modèle d'origine</a:t>
+            </a:r>
+          </a:p>
+        </p:txBody>
+      </p:sp>
+    </p:spTree>
+    <p:extLst>
+      <p:ext uri="{BB962C8B-B14F-4D97-AF65-F5344CB8AC3E}">
+        <p14:creationId xmlns:p14="http://schemas.microsoft.com/office/powerpoint/2010/main" val="1924057042"/>
+      </p:ext>
+    </p:extLst>
+  </p:cSld>
+  <p:clrMapOvr>
+    <a:masterClrMapping/>
+  </p:clrMapOvr>
+</p:sld>
+</file>
+
+<file path=ppt/slides/slide24.xml><?xml version="1.0" encoding="utf-8"?>
+<p:sld xmlns:a="http://schemas.openxmlformats.org/drawingml/2006/main" xmlns:r="http://schemas.openxmlformats.org/officeDocument/2006/relationships" xmlns:p="http://schemas.openxmlformats.org/presentationml/2006/main">
+  <p:cSld>
+    <p:spTree>
+      <p:nvGrpSpPr>
+        <p:cNvPr id="1" name=""/>
+        <p:cNvGrpSpPr/>
+        <p:nvPr/>
+      </p:nvGrpSpPr>
+      <p:grpSpPr>
+        <a:xfrm>
+          <a:off x="0" y="0"/>
+          <a:ext cx="0" cy="0"/>
+          <a:chOff x="0" y="0"/>
+          <a:chExt cx="0" cy="0"/>
+        </a:xfrm>
+      </p:grpSpPr>
+      <p:sp>
+        <p:nvSpPr>
+          <p:cNvPr id="2" name="Titre 1">
+            <a:extLst>
+              <a:ext uri="{FF2B5EF4-FFF2-40B4-BE49-F238E27FC236}">
+                <a16:creationId xmlns:a16="http://schemas.microsoft.com/office/drawing/2014/main" id="{9F2B7D5D-9B4A-83B0-407E-417EFCF611C5}"/>
+              </a:ext>
+            </a:extLst>
+          </p:cNvPr>
+          <p:cNvSpPr>
+            <a:spLocks noGrp="1"/>
+          </p:cNvSpPr>
+          <p:nvPr>
+            <p:ph type="title"/>
+          </p:nvPr>
+        </p:nvSpPr>
+        <p:spPr/>
+        <p:txBody>
+          <a:bodyPr/>
+          <a:lstStyle/>
+          <a:p>
+            <a:r>
+              <a:rPr lang="fr-FR" dirty="0" err="1"/>
+              <a:t>QLora</a:t>
+            </a:r>
+            <a:endParaRPr lang="fr-FR" dirty="0"/>
+          </a:p>
+        </p:txBody>
+      </p:sp>
+      <p:sp>
+        <p:nvSpPr>
+          <p:cNvPr id="3" name="Espace réservé du contenu 2">
+            <a:extLst>
+              <a:ext uri="{FF2B5EF4-FFF2-40B4-BE49-F238E27FC236}">
+                <a16:creationId xmlns:a16="http://schemas.microsoft.com/office/drawing/2014/main" id="{473DDB84-EB90-C947-F8F2-527AC9F0E246}"/>
+              </a:ext>
+            </a:extLst>
+          </p:cNvPr>
+          <p:cNvSpPr>
+            <a:spLocks noGrp="1"/>
+          </p:cNvSpPr>
+          <p:nvPr>
+            <p:ph idx="1"/>
+          </p:nvPr>
+        </p:nvSpPr>
+        <p:spPr/>
+        <p:txBody>
+          <a:bodyPr/>
+          <a:lstStyle/>
+          <a:p>
+            <a:r>
+              <a:rPr lang="fr-FR" dirty="0" err="1"/>
+              <a:t>Quantization</a:t>
+            </a:r>
+            <a:endParaRPr lang="fr-FR" dirty="0"/>
+          </a:p>
+          <a:p>
+            <a:pPr lvl="1"/>
+            <a:r>
+              <a:rPr lang="fr-FR" dirty="0"/>
+              <a:t>Par défaut les poids sont des float32</a:t>
+            </a:r>
+          </a:p>
+          <a:p>
+            <a:pPr lvl="1"/>
+            <a:r>
+              <a:rPr lang="fr-FR" dirty="0"/>
+              <a:t>Passage des poids en float16</a:t>
+            </a:r>
+          </a:p>
+          <a:p>
+            <a:pPr lvl="1"/>
+            <a:r>
+              <a:rPr lang="fr-FR" dirty="0"/>
+              <a:t>Les poids </a:t>
+            </a:r>
+            <a:r>
+              <a:rPr lang="fr-FR" dirty="0" err="1"/>
+              <a:t>Qlora</a:t>
+            </a:r>
+            <a:r>
+              <a:rPr lang="fr-FR" dirty="0"/>
+              <a:t> peuvent </a:t>
+            </a:r>
+            <a:r>
+              <a:rPr lang="fr-FR" dirty="0" err="1"/>
+              <a:t>décendre</a:t>
+            </a:r>
+            <a:r>
+              <a:rPr lang="fr-FR" dirty="0"/>
+              <a:t> à NF4 (équivalent d'un float4)</a:t>
+            </a:r>
+          </a:p>
+        </p:txBody>
+      </p:sp>
+    </p:spTree>
+    <p:extLst>
+      <p:ext uri="{BB962C8B-B14F-4D97-AF65-F5344CB8AC3E}">
+        <p14:creationId xmlns:p14="http://schemas.microsoft.com/office/powerpoint/2010/main" val="1148820270"/>
       </p:ext>
     </p:extLst>
   </p:cSld>

--- a/ppt/RAG13-FineTuning.pptx
+++ b/ppt/RAG13-FineTuning.pptx
@@ -5,10 +5,10 @@
     <p:sldMasterId id="2147483653" r:id="rId1"/>
   </p:sldMasterIdLst>
   <p:notesMasterIdLst>
-    <p:notesMasterId r:id="rId26"/>
+    <p:notesMasterId r:id="rId29"/>
   </p:notesMasterIdLst>
   <p:handoutMasterIdLst>
-    <p:handoutMasterId r:id="rId27"/>
+    <p:handoutMasterId r:id="rId30"/>
   </p:handoutMasterIdLst>
   <p:sldIdLst>
     <p:sldId id="264" r:id="rId2"/>
@@ -35,6 +35,9 @@
     <p:sldId id="349" r:id="rId23"/>
     <p:sldId id="346" r:id="rId24"/>
     <p:sldId id="347" r:id="rId25"/>
+    <p:sldId id="350" r:id="rId26"/>
+    <p:sldId id="351" r:id="rId27"/>
+    <p:sldId id="352" r:id="rId28"/>
   </p:sldIdLst>
   <p:sldSz cx="9144000" cy="6858000" type="screen4x3"/>
   <p:notesSz cx="6648450" cy="9782175"/>
@@ -5011,6 +5014,27 @@
           <a:lstStyle/>
           <a:p>
             <a:r>
+              <a:rPr lang="fr-FR" dirty="0"/>
+              <a:t>PEFT</a:t>
+            </a:r>
+          </a:p>
+          <a:p>
+            <a:pPr lvl="1"/>
+            <a:r>
+              <a:rPr lang="fr-FR" dirty="0"/>
+              <a:t>The </a:t>
+            </a:r>
+            <a:r>
+              <a:rPr lang="fr-FR" dirty="0" err="1"/>
+              <a:t>Parameter</a:t>
+            </a:r>
+            <a:r>
+              <a:rPr lang="fr-FR" dirty="0"/>
+              <a:t>-Efficient Fine-tuning</a:t>
+            </a:r>
+          </a:p>
+          <a:p>
+            <a:r>
               <a:rPr lang="fr-FR" dirty="0" err="1"/>
               <a:t>Epochs</a:t>
             </a:r>
@@ -5587,32 +5611,49 @@
       </p:sp>
       <p:pic>
         <p:nvPicPr>
-          <p:cNvPr id="5" name="Image 4">
+          <p:cNvPr id="1026" name="Picture 2">
             <a:extLst>
               <a:ext uri="{FF2B5EF4-FFF2-40B4-BE49-F238E27FC236}">
-                <a16:creationId xmlns:a16="http://schemas.microsoft.com/office/drawing/2014/main" id="{591D2084-09CA-F63C-27D6-F0AC94078800}"/>
+                <a16:creationId xmlns:a16="http://schemas.microsoft.com/office/drawing/2014/main" id="{A9C84EE7-69C9-65A8-032B-A50F5FF67289}"/>
               </a:ext>
             </a:extLst>
           </p:cNvPr>
           <p:cNvPicPr>
-            <a:picLocks noChangeAspect="1"/>
+            <a:picLocks noChangeAspect="1" noChangeArrowheads="1"/>
           </p:cNvPicPr>
           <p:nvPr/>
         </p:nvPicPr>
         <p:blipFill>
-          <a:blip r:embed="rId2"/>
+          <a:blip r:embed="rId2">
+            <a:extLst>
+              <a:ext uri="{28A0092B-C50C-407E-A947-70E740481C1C}">
+                <a14:useLocalDpi xmlns:a14="http://schemas.microsoft.com/office/drawing/2010/main" val="0"/>
+              </a:ext>
+            </a:extLst>
+          </a:blip>
+          <a:srcRect/>
           <a:stretch>
             <a:fillRect/>
           </a:stretch>
         </p:blipFill>
-        <p:spPr>
+        <p:spPr bwMode="auto">
           <a:xfrm>
-            <a:off x="1554683" y="1156209"/>
-            <a:ext cx="6401693" cy="5287113"/>
+            <a:off x="404813" y="1085850"/>
+            <a:ext cx="8334375" cy="4686300"/>
           </a:xfrm>
           <a:prstGeom prst="rect">
             <a:avLst/>
           </a:prstGeom>
+          <a:noFill/>
+          <a:extLst>
+            <a:ext uri="{909E8E84-426E-40DD-AFC4-6F175D3DCCD1}">
+              <a14:hiddenFill xmlns:a14="http://schemas.microsoft.com/office/drawing/2010/main">
+                <a:solidFill>
+                  <a:srgbClr val="FFFFFF"/>
+                </a:solidFill>
+              </a14:hiddenFill>
+            </a:ext>
+          </a:extLst>
         </p:spPr>
       </p:pic>
     </p:spTree>
@@ -6014,6 +6055,367 @@
     <p:extLst>
       <p:ext uri="{BB962C8B-B14F-4D97-AF65-F5344CB8AC3E}">
         <p14:creationId xmlns:p14="http://schemas.microsoft.com/office/powerpoint/2010/main" val="1148820270"/>
+      </p:ext>
+    </p:extLst>
+  </p:cSld>
+  <p:clrMapOvr>
+    <a:masterClrMapping/>
+  </p:clrMapOvr>
+</p:sld>
+</file>
+
+<file path=ppt/slides/slide25.xml><?xml version="1.0" encoding="utf-8"?>
+<p:sld xmlns:a="http://schemas.openxmlformats.org/drawingml/2006/main" xmlns:r="http://schemas.openxmlformats.org/officeDocument/2006/relationships" xmlns:p="http://schemas.openxmlformats.org/presentationml/2006/main">
+  <p:cSld>
+    <p:spTree>
+      <p:nvGrpSpPr>
+        <p:cNvPr id="1" name=""/>
+        <p:cNvGrpSpPr/>
+        <p:nvPr/>
+      </p:nvGrpSpPr>
+      <p:grpSpPr>
+        <a:xfrm>
+          <a:off x="0" y="0"/>
+          <a:ext cx="0" cy="0"/>
+          <a:chOff x="0" y="0"/>
+          <a:chExt cx="0" cy="0"/>
+        </a:xfrm>
+      </p:grpSpPr>
+      <p:sp>
+        <p:nvSpPr>
+          <p:cNvPr id="2" name="Titre 1">
+            <a:extLst>
+              <a:ext uri="{FF2B5EF4-FFF2-40B4-BE49-F238E27FC236}">
+                <a16:creationId xmlns:a16="http://schemas.microsoft.com/office/drawing/2014/main" id="{B7373A65-E1A7-857C-5751-E59E0B469D00}"/>
+              </a:ext>
+            </a:extLst>
+          </p:cNvPr>
+          <p:cNvSpPr>
+            <a:spLocks noGrp="1"/>
+          </p:cNvSpPr>
+          <p:nvPr>
+            <p:ph type="title"/>
+          </p:nvPr>
+        </p:nvSpPr>
+        <p:spPr/>
+        <p:txBody>
+          <a:bodyPr/>
+          <a:lstStyle/>
+          <a:p>
+            <a:r>
+              <a:rPr lang="fr-FR" dirty="0" err="1"/>
+              <a:t>Peft</a:t>
+            </a:r>
+            <a:endParaRPr lang="fr-FR" dirty="0"/>
+          </a:p>
+        </p:txBody>
+      </p:sp>
+      <p:pic>
+        <p:nvPicPr>
+          <p:cNvPr id="7" name="Espace réservé du contenu 6">
+            <a:extLst>
+              <a:ext uri="{FF2B5EF4-FFF2-40B4-BE49-F238E27FC236}">
+                <a16:creationId xmlns:a16="http://schemas.microsoft.com/office/drawing/2014/main" id="{8530DDE8-D392-24A7-B186-02CD0D71849B}"/>
+              </a:ext>
+            </a:extLst>
+          </p:cNvPr>
+          <p:cNvPicPr>
+            <a:picLocks noGrp="1" noChangeAspect="1"/>
+          </p:cNvPicPr>
+          <p:nvPr>
+            <p:ph idx="1"/>
+          </p:nvPr>
+        </p:nvPicPr>
+        <p:blipFill>
+          <a:blip r:embed="rId2"/>
+          <a:stretch>
+            <a:fillRect/>
+          </a:stretch>
+        </p:blipFill>
+        <p:spPr bwMode="auto">
+          <a:xfrm>
+            <a:off x="395536" y="2604118"/>
+            <a:ext cx="4363059" cy="2981741"/>
+          </a:xfrm>
+          <a:prstGeom prst="rect">
+            <a:avLst/>
+          </a:prstGeom>
+          <a:noFill/>
+          <a:ln>
+            <a:noFill/>
+          </a:ln>
+          <a:extLst>
+            <a:ext uri="{909E8E84-426E-40DD-AFC4-6F175D3DCCD1}">
+              <a14:hiddenFill xmlns:a14="http://schemas.microsoft.com/office/drawing/2010/main">
+                <a:solidFill>
+                  <a:srgbClr val="FFFFFF"/>
+                </a:solidFill>
+              </a14:hiddenFill>
+            </a:ext>
+            <a:ext uri="{91240B29-F687-4F45-9708-019B960494DF}">
+              <a14:hiddenLine xmlns:a14="http://schemas.microsoft.com/office/drawing/2010/main" w="9525">
+                <a:solidFill>
+                  <a:srgbClr val="000000"/>
+                </a:solidFill>
+                <a:miter lim="800000"/>
+                <a:headEnd/>
+                <a:tailEnd/>
+              </a14:hiddenLine>
+            </a:ext>
+          </a:extLst>
+        </p:spPr>
+      </p:pic>
+      <p:pic>
+        <p:nvPicPr>
+          <p:cNvPr id="5" name="Image 4">
+            <a:extLst>
+              <a:ext uri="{FF2B5EF4-FFF2-40B4-BE49-F238E27FC236}">
+                <a16:creationId xmlns:a16="http://schemas.microsoft.com/office/drawing/2014/main" id="{E951095B-26EE-9FDA-558F-F0324C2C63C3}"/>
+              </a:ext>
+            </a:extLst>
+          </p:cNvPr>
+          <p:cNvPicPr>
+            <a:picLocks noChangeAspect="1"/>
+          </p:cNvPicPr>
+          <p:nvPr/>
+        </p:nvPicPr>
+        <p:blipFill>
+          <a:blip r:embed="rId3"/>
+          <a:stretch>
+            <a:fillRect/>
+          </a:stretch>
+        </p:blipFill>
+        <p:spPr>
+          <a:xfrm>
+            <a:off x="198437" y="1268760"/>
+            <a:ext cx="5725324" cy="1066949"/>
+          </a:xfrm>
+          <a:prstGeom prst="rect">
+            <a:avLst/>
+          </a:prstGeom>
+        </p:spPr>
+      </p:pic>
+    </p:spTree>
+    <p:extLst>
+      <p:ext uri="{BB962C8B-B14F-4D97-AF65-F5344CB8AC3E}">
+        <p14:creationId xmlns:p14="http://schemas.microsoft.com/office/powerpoint/2010/main" val="2854954485"/>
+      </p:ext>
+    </p:extLst>
+  </p:cSld>
+  <p:clrMapOvr>
+    <a:masterClrMapping/>
+  </p:clrMapOvr>
+</p:sld>
+</file>
+
+<file path=ppt/slides/slide26.xml><?xml version="1.0" encoding="utf-8"?>
+<p:sld xmlns:a="http://schemas.openxmlformats.org/drawingml/2006/main" xmlns:r="http://schemas.openxmlformats.org/officeDocument/2006/relationships" xmlns:p="http://schemas.openxmlformats.org/presentationml/2006/main">
+  <p:cSld>
+    <p:spTree>
+      <p:nvGrpSpPr>
+        <p:cNvPr id="1" name=""/>
+        <p:cNvGrpSpPr/>
+        <p:nvPr/>
+      </p:nvGrpSpPr>
+      <p:grpSpPr>
+        <a:xfrm>
+          <a:off x="0" y="0"/>
+          <a:ext cx="0" cy="0"/>
+          <a:chOff x="0" y="0"/>
+          <a:chExt cx="0" cy="0"/>
+        </a:xfrm>
+      </p:grpSpPr>
+      <p:sp>
+        <p:nvSpPr>
+          <p:cNvPr id="2" name="Titre 1">
+            <a:extLst>
+              <a:ext uri="{FF2B5EF4-FFF2-40B4-BE49-F238E27FC236}">
+                <a16:creationId xmlns:a16="http://schemas.microsoft.com/office/drawing/2014/main" id="{0F91260E-884C-5822-8241-94BDFF353C71}"/>
+              </a:ext>
+            </a:extLst>
+          </p:cNvPr>
+          <p:cNvSpPr>
+            <a:spLocks noGrp="1"/>
+          </p:cNvSpPr>
+          <p:nvPr>
+            <p:ph type="title"/>
+          </p:nvPr>
+        </p:nvSpPr>
+        <p:spPr/>
+        <p:txBody>
+          <a:bodyPr/>
+          <a:lstStyle/>
+          <a:p>
+            <a:r>
+              <a:rPr lang="fr-FR" dirty="0"/>
+              <a:t>Trainer</a:t>
+            </a:r>
+          </a:p>
+        </p:txBody>
+      </p:sp>
+      <p:pic>
+        <p:nvPicPr>
+          <p:cNvPr id="5" name="Espace réservé du contenu 4">
+            <a:extLst>
+              <a:ext uri="{FF2B5EF4-FFF2-40B4-BE49-F238E27FC236}">
+                <a16:creationId xmlns:a16="http://schemas.microsoft.com/office/drawing/2014/main" id="{12F7EEE2-D7F3-C621-1E4A-EB0BF6CC77CD}"/>
+              </a:ext>
+            </a:extLst>
+          </p:cNvPr>
+          <p:cNvPicPr>
+            <a:picLocks noGrp="1" noChangeAspect="1"/>
+          </p:cNvPicPr>
+          <p:nvPr>
+            <p:ph idx="1"/>
+          </p:nvPr>
+        </p:nvPicPr>
+        <p:blipFill>
+          <a:blip r:embed="rId2"/>
+          <a:stretch>
+            <a:fillRect/>
+          </a:stretch>
+        </p:blipFill>
+        <p:spPr bwMode="auto">
+          <a:xfrm>
+            <a:off x="547127" y="1641949"/>
+            <a:ext cx="8030696" cy="4582164"/>
+          </a:xfrm>
+          <a:prstGeom prst="rect">
+            <a:avLst/>
+          </a:prstGeom>
+          <a:noFill/>
+          <a:ln>
+            <a:noFill/>
+          </a:ln>
+          <a:extLst>
+            <a:ext uri="{909E8E84-426E-40DD-AFC4-6F175D3DCCD1}">
+              <a14:hiddenFill xmlns:a14="http://schemas.microsoft.com/office/drawing/2010/main">
+                <a:solidFill>
+                  <a:srgbClr val="FFFFFF"/>
+                </a:solidFill>
+              </a14:hiddenFill>
+            </a:ext>
+            <a:ext uri="{91240B29-F687-4F45-9708-019B960494DF}">
+              <a14:hiddenLine xmlns:a14="http://schemas.microsoft.com/office/drawing/2010/main" w="9525">
+                <a:solidFill>
+                  <a:srgbClr val="000000"/>
+                </a:solidFill>
+                <a:miter lim="800000"/>
+                <a:headEnd/>
+                <a:tailEnd/>
+              </a14:hiddenLine>
+            </a:ext>
+          </a:extLst>
+        </p:spPr>
+      </p:pic>
+    </p:spTree>
+    <p:extLst>
+      <p:ext uri="{BB962C8B-B14F-4D97-AF65-F5344CB8AC3E}">
+        <p14:creationId xmlns:p14="http://schemas.microsoft.com/office/powerpoint/2010/main" val="537511725"/>
+      </p:ext>
+    </p:extLst>
+  </p:cSld>
+  <p:clrMapOvr>
+    <a:masterClrMapping/>
+  </p:clrMapOvr>
+</p:sld>
+</file>
+
+<file path=ppt/slides/slide27.xml><?xml version="1.0" encoding="utf-8"?>
+<p:sld xmlns:a="http://schemas.openxmlformats.org/drawingml/2006/main" xmlns:r="http://schemas.openxmlformats.org/officeDocument/2006/relationships" xmlns:p="http://schemas.openxmlformats.org/presentationml/2006/main">
+  <p:cSld>
+    <p:spTree>
+      <p:nvGrpSpPr>
+        <p:cNvPr id="1" name=""/>
+        <p:cNvGrpSpPr/>
+        <p:nvPr/>
+      </p:nvGrpSpPr>
+      <p:grpSpPr>
+        <a:xfrm>
+          <a:off x="0" y="0"/>
+          <a:ext cx="0" cy="0"/>
+          <a:chOff x="0" y="0"/>
+          <a:chExt cx="0" cy="0"/>
+        </a:xfrm>
+      </p:grpSpPr>
+      <p:sp>
+        <p:nvSpPr>
+          <p:cNvPr id="2" name="Titre 1">
+            <a:extLst>
+              <a:ext uri="{FF2B5EF4-FFF2-40B4-BE49-F238E27FC236}">
+                <a16:creationId xmlns:a16="http://schemas.microsoft.com/office/drawing/2014/main" id="{289C8C4A-18C2-6DED-F21D-D286BCAAC760}"/>
+              </a:ext>
+            </a:extLst>
+          </p:cNvPr>
+          <p:cNvSpPr>
+            <a:spLocks noGrp="1"/>
+          </p:cNvSpPr>
+          <p:nvPr>
+            <p:ph type="title"/>
+          </p:nvPr>
+        </p:nvSpPr>
+        <p:spPr/>
+        <p:txBody>
+          <a:bodyPr/>
+          <a:lstStyle/>
+          <a:p>
+            <a:r>
+              <a:rPr lang="fr-FR" dirty="0" err="1"/>
+              <a:t>Reinforcement</a:t>
+            </a:r>
+            <a:endParaRPr lang="fr-FR" dirty="0"/>
+          </a:p>
+        </p:txBody>
+      </p:sp>
+      <p:sp>
+        <p:nvSpPr>
+          <p:cNvPr id="3" name="Espace réservé du contenu 2">
+            <a:extLst>
+              <a:ext uri="{FF2B5EF4-FFF2-40B4-BE49-F238E27FC236}">
+                <a16:creationId xmlns:a16="http://schemas.microsoft.com/office/drawing/2014/main" id="{64063C0A-602D-1630-296F-3F4CE0C120FA}"/>
+              </a:ext>
+            </a:extLst>
+          </p:cNvPr>
+          <p:cNvSpPr>
+            <a:spLocks noGrp="1"/>
+          </p:cNvSpPr>
+          <p:nvPr>
+            <p:ph idx="1"/>
+          </p:nvPr>
+        </p:nvSpPr>
+        <p:spPr/>
+        <p:txBody>
+          <a:bodyPr/>
+          <a:lstStyle/>
+          <a:p>
+            <a:r>
+              <a:rPr lang="fr-FR" dirty="0"/>
+              <a:t>Il s'agit d'effectuer un fine tuning avec un feedback humain</a:t>
+            </a:r>
+          </a:p>
+          <a:p>
+            <a:r>
+              <a:rPr lang="fr-FR" dirty="0"/>
+              <a:t>RLHF</a:t>
+            </a:r>
+          </a:p>
+          <a:p>
+            <a:pPr lvl="1"/>
+            <a:r>
+              <a:rPr lang="fr-FR"/>
+              <a:t>Reinforcement</a:t>
+            </a:r>
+            <a:r>
+              <a:rPr lang="fr-FR" dirty="0"/>
+              <a:t> Learning Human Feedback</a:t>
+            </a:r>
+          </a:p>
+        </p:txBody>
+      </p:sp>
+    </p:spTree>
+    <p:extLst>
+      <p:ext uri="{BB962C8B-B14F-4D97-AF65-F5344CB8AC3E}">
+        <p14:creationId xmlns:p14="http://schemas.microsoft.com/office/powerpoint/2010/main" val="2662156449"/>
       </p:ext>
     </p:extLst>
   </p:cSld>
